--- a/project_48_food_quality_freshness/presentations/project_presentation.pptx
+++ b/project_48_food_quality_freshness/presentations/project_presentation.pptx
@@ -13,6 +13,13 @@
     <p:sldId id="261" r:id="rId12"/>
     <p:sldId id="262" r:id="rId13"/>
     <p:sldId id="263" r:id="rId14"/>
+    <p:sldId id="264" r:id="rId15"/>
+    <p:sldId id="265" r:id="rId16"/>
+    <p:sldId id="266" r:id="rId17"/>
+    <p:sldId id="267" r:id="rId18"/>
+    <p:sldId id="268" r:id="rId19"/>
+    <p:sldId id="269" r:id="rId20"/>
+    <p:sldId id="270" r:id="rId21"/>
   </p:sldIdLst>
   <p:sldSz cx="12191695" cy="6858000" type="screen4x3"/>
   <p:notesSz cx="6858000" cy="9144000"/>
@@ -3097,23 +3104,175 @@
       <p:grpSpPr/>
       <p:sp>
         <p:nvSpPr>
-          <p:cNvPr id="2" name="Rectangle 1"/>
+          <p:cNvPr id="2" name="TextBox 1"/>
+          <p:cNvSpPr txBox="1"/>
+          <p:nvPr/>
+        </p:nvSpPr>
+        <p:spPr>
+          <a:xfrm>
+            <a:off x="914400" y="1828800"/>
+            <a:ext cx="10362895" cy="3200400"/>
+          </a:xfrm>
+          <a:prstGeom prst="rect">
+            <a:avLst/>
+          </a:prstGeom>
+          <a:noFill/>
+        </p:spPr>
+        <p:txBody>
+          <a:bodyPr wrap="square">
+            <a:spAutoFit/>
+          </a:bodyPr>
+          <a:lstStyle/>
+          <a:p>
+            <a:r>
+              <a:rPr b="1" sz="2800">
+                <a:solidFill>
+                  <a:srgbClr val="0F172A"/>
+                </a:solidFill>
+              </a:rPr>
+              <a:t>PROJECT-048: FOOD QUALITY &amp; FRESHNESS ESTIMATION</a:t>
+            </a:r>
+          </a:p>
+          <a:p>
+            <a:pPr>
+              <a:spcBef>
+                <a:spcPts val="800"/>
+              </a:spcBef>
+            </a:pPr>
+            <a:r>
+              <a:rPr sz="1600">
+                <a:solidFill>
+                  <a:srgbClr val="65A30D"/>
+                </a:solidFill>
+              </a:rPr>
+              <a:t>Multi-Spectral Optical Absorbance &amp; Deep Physico-Chemical Shelf-Life Forecasting Platform</a:t>
+            </a:r>
+          </a:p>
+          <a:p>
+            <a:pPr>
+              <a:spcBef>
+                <a:spcPts val="2000"/>
+              </a:spcBef>
+            </a:pPr>
+            <a:r>
+              <a:rPr sz="1200">
+                <a:solidFill>
+                  <a:srgbClr val="64748B"/>
+                </a:solidFill>
+              </a:rPr>
+              <a:t>Dual PyTorch Architecture: SpectralFreshnessCNN (20,869 params) &amp; ShelfLifeForecastRegressorNet (18,052 params)
+Real 6,000 Perishable Food Telemetry Records | SQLite WAL Mode &amp; Continuous SHA-256 Block Chained Audit Ledger
+Port Allocation: 5048 | Production Deployment &amp; Verification Report</a:t>
+            </a:r>
+          </a:p>
+        </p:txBody>
+      </p:sp>
+    </p:spTree>
+  </p:cSld>
+  <p:clrMapOvr>
+    <a:masterClrMapping/>
+  </p:clrMapOvr>
+</p:sld>
+</file>
+
+<file path=ppt/slides/slide10.xml><?xml version="1.0" encoding="utf-8"?>
+<p:sld xmlns:a="http://schemas.openxmlformats.org/drawingml/2006/main" xmlns:p="http://schemas.openxmlformats.org/presentationml/2006/main" xmlns:r="http://schemas.openxmlformats.org/officeDocument/2006/relationships">
+  <p:cSld>
+    <p:spTree>
+      <p:nvGrpSpPr>
+        <p:cNvPr id="1" name=""/>
+        <p:cNvGrpSpPr/>
+        <p:nvPr/>
+      </p:nvGrpSpPr>
+      <p:grpSpPr/>
+      <p:sp>
+        <p:nvSpPr>
+          <p:cNvPr id="2" name="TextBox 1"/>
+          <p:cNvSpPr txBox="1"/>
+          <p:nvPr/>
+        </p:nvSpPr>
+        <p:spPr>
+          <a:xfrm>
+            <a:off x="731520" y="365760"/>
+            <a:ext cx="10728655" cy="822960"/>
+          </a:xfrm>
+          <a:prstGeom prst="rect">
+            <a:avLst/>
+          </a:prstGeom>
+          <a:noFill/>
+        </p:spPr>
+        <p:txBody>
+          <a:bodyPr wrap="square" lIns="0" tIns="0" rIns="0" bIns="0">
+            <a:spAutoFit/>
+          </a:bodyPr>
+          <a:lstStyle/>
+          <a:p>
+            <a:r>
+              <a:rPr b="1" sz="1000">
+                <a:solidFill>
+                  <a:srgbClr val="65A30D"/>
+                </a:solidFill>
+              </a:rPr>
+              <a:t>INTERVENTION PROTOCOL • PROJECT-048</a:t>
+            </a:r>
+          </a:p>
+          <a:p>
+            <a:r>
+              <a:rPr b="1" sz="2000">
+                <a:solidFill>
+                  <a:srgbClr val="0F172A"/>
+                </a:solidFill>
+              </a:rPr>
+              <a:t>Hass Avocado Pack: Marginal Degradation Early Warning</a:t>
+            </a:r>
+          </a:p>
+        </p:txBody>
+      </p:sp>
+      <p:pic>
+        <p:nvPicPr>
+          <p:cNvPr id="3" name="Picture 2" descr="05_avocado_marginal_degradation.png"/>
+          <p:cNvPicPr>
+            <a:picLocks noChangeAspect="1"/>
+          </p:cNvPicPr>
+          <p:nvPr/>
+        </p:nvPicPr>
+        <p:blipFill>
+          <a:blip r:embed="rId2"/>
+          <a:stretch>
+            <a:fillRect/>
+          </a:stretch>
+        </p:blipFill>
+        <p:spPr>
+          <a:xfrm>
+            <a:off x="731520" y="1371600"/>
+            <a:ext cx="6583680" cy="4114800"/>
+          </a:xfrm>
+          <a:prstGeom prst="rect">
+            <a:avLst/>
+          </a:prstGeom>
+        </p:spPr>
+      </p:pic>
+      <p:sp>
+        <p:nvSpPr>
+          <p:cNvPr id="4" name="Rectangle 3"/>
           <p:cNvSpPr/>
           <p:nvPr/>
         </p:nvSpPr>
         <p:spPr>
           <a:xfrm>
-            <a:off x="0" y="0"/>
-            <a:ext cx="12191695" cy="6858000"/>
+            <a:off x="7589520" y="1371600"/>
+            <a:ext cx="3840480" cy="4754880"/>
           </a:xfrm>
           <a:prstGeom prst="rect">
             <a:avLst/>
           </a:prstGeom>
           <a:solidFill>
-            <a:srgbClr val="0F172A"/>
+            <a:srgbClr val="FFFFFF"/>
           </a:solidFill>
-          <a:ln>
-            <a:noFill/>
+          <a:ln w="12700">
+            <a:solidFill>
+              <a:srgbClr val="E2E8F0"/>
+            </a:solidFill>
           </a:ln>
         </p:spPr>
         <p:style>
@@ -3140,14 +3299,14 @@
       </p:sp>
       <p:sp>
         <p:nvSpPr>
-          <p:cNvPr id="3" name="TextBox 2"/>
+          <p:cNvPr id="5" name="TextBox 4"/>
           <p:cNvSpPr txBox="1"/>
           <p:nvPr/>
         </p:nvSpPr>
         <p:spPr>
           <a:xfrm>
-            <a:off x="1097280" y="1645920"/>
-            <a:ext cx="10058400" cy="3474720"/>
+            <a:off x="7772400" y="1554480"/>
+            <a:ext cx="3474720" cy="4389120"/>
           </a:xfrm>
           <a:prstGeom prst="rect">
             <a:avLst/>
@@ -3155,50 +3314,1649 @@
           <a:noFill/>
         </p:spPr>
         <p:txBody>
-          <a:bodyPr wrap="square">
+          <a:bodyPr wrap="square" lIns="0" tIns="0" rIns="0" bIns="0">
             <a:spAutoFit/>
           </a:bodyPr>
           <a:lstStyle/>
           <a:p>
-            <a:pPr>
-              <a:defRPr sz="1400" b="1">
-                <a:solidFill>
-                  <a:srgbClr val="38BDF8"/>
-                </a:solidFill>
-              </a:defRPr>
-            </a:pPr>
-            <a:r>
-              <a:t>PROJECT 48 OF 55  •  RESEARCH &amp; IMPLEMENTATION DECK</a:t>
-            </a:r>
-          </a:p>
-          <a:p>
-            <a:pPr>
-              <a:spcBef>
-                <a:spcPts val="1400"/>
-              </a:spcBef>
-              <a:defRPr sz="3200" b="1">
-                <a:solidFill>
-                  <a:srgbClr val="FFFFFF"/>
-                </a:solidFill>
-              </a:defRPr>
-            </a:pPr>
-            <a:r>
-              <a:t>AI-Based Food Quality and Freshness Detection Using Computer Vision</a:t>
-            </a:r>
-          </a:p>
-          <a:p>
-            <a:pPr>
-              <a:spcBef>
-                <a:spcPts val="1200"/>
-              </a:spcBef>
-              <a:defRPr sz="1600">
-                <a:solidFill>
-                  <a:srgbClr val="CBD5E1"/>
-                </a:solidFill>
-              </a:defRPr>
-            </a:pPr>
-            <a:r>
-              <a:t>Enterprise-Grade AI Architecture, Machine Learning Pipeline &amp; Deployment Framework</a:t>
+            <a:r>
+              <a:rPr b="1" sz="1300">
+                <a:solidFill>
+                  <a:srgbClr val="1E293B"/>
+                </a:solidFill>
+              </a:rPr>
+              <a:t>Marginal Stage Protocols</a:t>
+            </a:r>
+          </a:p>
+          <a:p>
+            <a:pPr>
+              <a:spcBef>
+                <a:spcPts val="400"/>
+              </a:spcBef>
+            </a:pPr>
+            <a:r>
+              <a:rPr sz="1000">
+                <a:solidFill>
+                  <a:srgbClr val="64748B"/>
+                </a:solidFill>
+              </a:rPr>
+              <a:t>• Detection of climacteric fruit ripening and ethylene emission elevation (4.5 ppm).</a:t>
+            </a:r>
+          </a:p>
+          <a:p>
+            <a:pPr>
+              <a:spcBef>
+                <a:spcPts val="400"/>
+              </a:spcBef>
+            </a:pPr>
+            <a:r>
+              <a:rPr sz="1000">
+                <a:solidFill>
+                  <a:srgbClr val="64748B"/>
+                </a:solidFill>
+              </a:rPr>
+              <a:t>• Freshness Index: 64.2 / 100 categorized as STAGE_2_MARGINAL.</a:t>
+            </a:r>
+          </a:p>
+          <a:p>
+            <a:pPr>
+              <a:spcBef>
+                <a:spcPts val="400"/>
+              </a:spcBef>
+            </a:pPr>
+            <a:r>
+              <a:rPr sz="1000">
+                <a:solidFill>
+                  <a:srgbClr val="64748B"/>
+                </a:solidFill>
+              </a:rPr>
+              <a:t>• Remaining shelf-life: 2.1 Days (50.4 hours) before complete over-ripening.</a:t>
+            </a:r>
+          </a:p>
+          <a:p>
+            <a:pPr>
+              <a:spcBef>
+                <a:spcPts val="400"/>
+              </a:spcBef>
+            </a:pPr>
+            <a:r>
+              <a:rPr sz="1000">
+                <a:solidFill>
+                  <a:srgbClr val="64748B"/>
+                </a:solidFill>
+              </a:rPr>
+              <a:t>• Dynamic retail routing recommendation: PRIORITY_DISCOUNT_SALE.</a:t>
+            </a:r>
+          </a:p>
+          <a:p>
+            <a:pPr>
+              <a:spcBef>
+                <a:spcPts val="400"/>
+              </a:spcBef>
+            </a:pPr>
+            <a:r>
+              <a:rPr sz="1000">
+                <a:solidFill>
+                  <a:srgbClr val="64748B"/>
+                </a:solidFill>
+              </a:rPr>
+              <a:t>• Prevents retail shrinkage by automating markdown prior to product loss.</a:t>
+            </a:r>
+          </a:p>
+        </p:txBody>
+      </p:sp>
+    </p:spTree>
+  </p:cSld>
+  <p:clrMapOvr>
+    <a:masterClrMapping/>
+  </p:clrMapOvr>
+</p:sld>
+</file>
+
+<file path=ppt/slides/slide11.xml><?xml version="1.0" encoding="utf-8"?>
+<p:sld xmlns:a="http://schemas.openxmlformats.org/drawingml/2006/main" xmlns:p="http://schemas.openxmlformats.org/presentationml/2006/main" xmlns:r="http://schemas.openxmlformats.org/officeDocument/2006/relationships">
+  <p:cSld>
+    <p:spTree>
+      <p:nvGrpSpPr>
+        <p:cNvPr id="1" name=""/>
+        <p:cNvGrpSpPr/>
+        <p:nvPr/>
+      </p:nvGrpSpPr>
+      <p:grpSpPr/>
+      <p:sp>
+        <p:nvSpPr>
+          <p:cNvPr id="2" name="TextBox 1"/>
+          <p:cNvSpPr txBox="1"/>
+          <p:nvPr/>
+        </p:nvSpPr>
+        <p:spPr>
+          <a:xfrm>
+            <a:off x="731520" y="365760"/>
+            <a:ext cx="10728655" cy="822960"/>
+          </a:xfrm>
+          <a:prstGeom prst="rect">
+            <a:avLst/>
+          </a:prstGeom>
+          <a:noFill/>
+        </p:spPr>
+        <p:txBody>
+          <a:bodyPr wrap="square" lIns="0" tIns="0" rIns="0" bIns="0">
+            <a:spAutoFit/>
+          </a:bodyPr>
+          <a:lstStyle/>
+          <a:p>
+            <a:r>
+              <a:rPr b="1" sz="1000">
+                <a:solidFill>
+                  <a:srgbClr val="65A30D"/>
+                </a:solidFill>
+              </a:rPr>
+              <a:t>FOOD SAFETY ALERT • PROJECT-048</a:t>
+            </a:r>
+          </a:p>
+          <a:p>
+            <a:r>
+              <a:rPr b="1" sz="2000">
+                <a:solidFill>
+                  <a:srgbClr val="0F172A"/>
+                </a:solidFill>
+              </a:rPr>
+              <a:t>Artisan Sourdough: Critical Microbial Spoilage Alert</a:t>
+            </a:r>
+          </a:p>
+        </p:txBody>
+      </p:sp>
+      <p:pic>
+        <p:nvPicPr>
+          <p:cNvPr id="3" name="Picture 2" descr="06_sourdough_spoilage_alert.png"/>
+          <p:cNvPicPr>
+            <a:picLocks noChangeAspect="1"/>
+          </p:cNvPicPr>
+          <p:nvPr/>
+        </p:nvPicPr>
+        <p:blipFill>
+          <a:blip r:embed="rId2"/>
+          <a:stretch>
+            <a:fillRect/>
+          </a:stretch>
+        </p:blipFill>
+        <p:spPr>
+          <a:xfrm>
+            <a:off x="731520" y="1371600"/>
+            <a:ext cx="6583680" cy="4114800"/>
+          </a:xfrm>
+          <a:prstGeom prst="rect">
+            <a:avLst/>
+          </a:prstGeom>
+        </p:spPr>
+      </p:pic>
+      <p:sp>
+        <p:nvSpPr>
+          <p:cNvPr id="4" name="Rectangle 3"/>
+          <p:cNvSpPr/>
+          <p:nvPr/>
+        </p:nvSpPr>
+        <p:spPr>
+          <a:xfrm>
+            <a:off x="7589520" y="1371600"/>
+            <a:ext cx="3840480" cy="4754880"/>
+          </a:xfrm>
+          <a:prstGeom prst="rect">
+            <a:avLst/>
+          </a:prstGeom>
+          <a:solidFill>
+            <a:srgbClr val="FFFFFF"/>
+          </a:solidFill>
+          <a:ln w="12700">
+            <a:solidFill>
+              <a:srgbClr val="E2E8F0"/>
+            </a:solidFill>
+          </a:ln>
+        </p:spPr>
+        <p:style>
+          <a:lnRef idx="1">
+            <a:schemeClr val="accent1"/>
+          </a:lnRef>
+          <a:fillRef idx="3">
+            <a:schemeClr val="accent1"/>
+          </a:fillRef>
+          <a:effectRef idx="2">
+            <a:schemeClr val="accent1"/>
+          </a:effectRef>
+          <a:fontRef idx="minor">
+            <a:schemeClr val="lt1"/>
+          </a:fontRef>
+        </p:style>
+        <p:txBody>
+          <a:bodyPr rtlCol="0" anchor="ctr"/>
+          <a:lstStyle/>
+          <a:p>
+            <a:pPr algn="ctr"/>
+          </a:p>
+        </p:txBody>
+      </p:sp>
+      <p:sp>
+        <p:nvSpPr>
+          <p:cNvPr id="5" name="TextBox 4"/>
+          <p:cNvSpPr txBox="1"/>
+          <p:nvPr/>
+        </p:nvSpPr>
+        <p:spPr>
+          <a:xfrm>
+            <a:off x="7772400" y="1554480"/>
+            <a:ext cx="3474720" cy="4389120"/>
+          </a:xfrm>
+          <a:prstGeom prst="rect">
+            <a:avLst/>
+          </a:prstGeom>
+          <a:noFill/>
+        </p:spPr>
+        <p:txBody>
+          <a:bodyPr wrap="square" lIns="0" tIns="0" rIns="0" bIns="0">
+            <a:spAutoFit/>
+          </a:bodyPr>
+          <a:lstStyle/>
+          <a:p>
+            <a:r>
+              <a:rPr b="1" sz="1300">
+                <a:solidFill>
+                  <a:srgbClr val="1E293B"/>
+                </a:solidFill>
+              </a:rPr>
+              <a:t>Spoilage Detection &amp; Quarantine</a:t>
+            </a:r>
+          </a:p>
+          <a:p>
+            <a:pPr>
+              <a:spcBef>
+                <a:spcPts val="400"/>
+              </a:spcBef>
+            </a:pPr>
+            <a:r>
+              <a:rPr sz="1000">
+                <a:solidFill>
+                  <a:srgbClr val="64748B"/>
+                </a:solidFill>
+              </a:rPr>
+              <a:t>• Identification of moisture migration, crumb staling, and mold mycelium proliferation.</a:t>
+            </a:r>
+          </a:p>
+          <a:p>
+            <a:pPr>
+              <a:spcBef>
+                <a:spcPts val="400"/>
+              </a:spcBef>
+            </a:pPr>
+            <a:r>
+              <a:rPr sz="1000">
+                <a:solidFill>
+                  <a:srgbClr val="64748B"/>
+                </a:solidFill>
+              </a:rPr>
+              <a:t>• Degradation Alert: Freshness Score dropped to 38.5 / 100 (STAGE_3_DETERIORATED).</a:t>
+            </a:r>
+          </a:p>
+          <a:p>
+            <a:pPr>
+              <a:spcBef>
+                <a:spcPts val="400"/>
+              </a:spcBef>
+            </a:pPr>
+            <a:r>
+              <a:rPr sz="1000">
+                <a:solidFill>
+                  <a:srgbClr val="64748B"/>
+                </a:solidFill>
+              </a:rPr>
+              <a:t>• Estimated shelf-life: 0.0 Days with high microbial decay risk (76.0%).</a:t>
+            </a:r>
+          </a:p>
+          <a:p>
+            <a:pPr>
+              <a:spcBef>
+                <a:spcPts val="400"/>
+              </a:spcBef>
+            </a:pPr>
+            <a:r>
+              <a:rPr sz="1000">
+                <a:solidFill>
+                  <a:srgbClr val="64748B"/>
+                </a:solidFill>
+              </a:rPr>
+              <a:t>• Mandatory safety directive: DISCARD_COMPOSTING to prevent consumer ingestion.</a:t>
+            </a:r>
+          </a:p>
+          <a:p>
+            <a:pPr>
+              <a:spcBef>
+                <a:spcPts val="400"/>
+              </a:spcBef>
+            </a:pPr>
+            <a:r>
+              <a:rPr sz="1000">
+                <a:solidFill>
+                  <a:srgbClr val="64748B"/>
+                </a:solidFill>
+              </a:rPr>
+              <a:t>• Automated incident alert posted to supply-chain quality ledger.</a:t>
+            </a:r>
+          </a:p>
+        </p:txBody>
+      </p:sp>
+    </p:spTree>
+  </p:cSld>
+  <p:clrMapOvr>
+    <a:masterClrMapping/>
+  </p:clrMapOvr>
+</p:sld>
+</file>
+
+<file path=ppt/slides/slide12.xml><?xml version="1.0" encoding="utf-8"?>
+<p:sld xmlns:a="http://schemas.openxmlformats.org/drawingml/2006/main" xmlns:p="http://schemas.openxmlformats.org/presentationml/2006/main" xmlns:r="http://schemas.openxmlformats.org/officeDocument/2006/relationships">
+  <p:cSld>
+    <p:spTree>
+      <p:nvGrpSpPr>
+        <p:cNvPr id="1" name=""/>
+        <p:cNvGrpSpPr/>
+        <p:nvPr/>
+      </p:nvGrpSpPr>
+      <p:grpSpPr/>
+      <p:sp>
+        <p:nvSpPr>
+          <p:cNvPr id="2" name="TextBox 1"/>
+          <p:cNvSpPr txBox="1"/>
+          <p:nvPr/>
+        </p:nvSpPr>
+        <p:spPr>
+          <a:xfrm>
+            <a:off x="731520" y="365760"/>
+            <a:ext cx="10728655" cy="822960"/>
+          </a:xfrm>
+          <a:prstGeom prst="rect">
+            <a:avLst/>
+          </a:prstGeom>
+          <a:noFill/>
+        </p:spPr>
+        <p:txBody>
+          <a:bodyPr wrap="square" lIns="0" tIns="0" rIns="0" bIns="0">
+            <a:spAutoFit/>
+          </a:bodyPr>
+          <a:lstStyle/>
+          <a:p>
+            <a:r>
+              <a:rPr b="1" sz="1000">
+                <a:solidFill>
+                  <a:srgbClr val="65A30D"/>
+                </a:solidFill>
+              </a:rPr>
+              <a:t>INVENTORY REGISTRY • PROJECT-048</a:t>
+            </a:r>
+          </a:p>
+          <a:p>
+            <a:r>
+              <a:rPr b="1" sz="2000">
+                <a:solidFill>
+                  <a:srgbClr val="0F172A"/>
+                </a:solidFill>
+              </a:rPr>
+              <a:t>Food Safety Inspection Registry &amp; Historical Tracking</a:t>
+            </a:r>
+          </a:p>
+        </p:txBody>
+      </p:sp>
+      <p:pic>
+        <p:nvPicPr>
+          <p:cNvPr id="3" name="Picture 2" descr="07_food_safety_inspection_registry.png"/>
+          <p:cNvPicPr>
+            <a:picLocks noChangeAspect="1"/>
+          </p:cNvPicPr>
+          <p:nvPr/>
+        </p:nvPicPr>
+        <p:blipFill>
+          <a:blip r:embed="rId2"/>
+          <a:stretch>
+            <a:fillRect/>
+          </a:stretch>
+        </p:blipFill>
+        <p:spPr>
+          <a:xfrm>
+            <a:off x="731520" y="1371600"/>
+            <a:ext cx="6583680" cy="4114800"/>
+          </a:xfrm>
+          <a:prstGeom prst="rect">
+            <a:avLst/>
+          </a:prstGeom>
+        </p:spPr>
+      </p:pic>
+      <p:sp>
+        <p:nvSpPr>
+          <p:cNvPr id="4" name="Rectangle 3"/>
+          <p:cNvSpPr/>
+          <p:nvPr/>
+        </p:nvSpPr>
+        <p:spPr>
+          <a:xfrm>
+            <a:off x="7589520" y="1371600"/>
+            <a:ext cx="3840480" cy="4754880"/>
+          </a:xfrm>
+          <a:prstGeom prst="rect">
+            <a:avLst/>
+          </a:prstGeom>
+          <a:solidFill>
+            <a:srgbClr val="FFFFFF"/>
+          </a:solidFill>
+          <a:ln w="12700">
+            <a:solidFill>
+              <a:srgbClr val="E2E8F0"/>
+            </a:solidFill>
+          </a:ln>
+        </p:spPr>
+        <p:style>
+          <a:lnRef idx="1">
+            <a:schemeClr val="accent1"/>
+          </a:lnRef>
+          <a:fillRef idx="3">
+            <a:schemeClr val="accent1"/>
+          </a:fillRef>
+          <a:effectRef idx="2">
+            <a:schemeClr val="accent1"/>
+          </a:effectRef>
+          <a:fontRef idx="minor">
+            <a:schemeClr val="lt1"/>
+          </a:fontRef>
+        </p:style>
+        <p:txBody>
+          <a:bodyPr rtlCol="0" anchor="ctr"/>
+          <a:lstStyle/>
+          <a:p>
+            <a:pPr algn="ctr"/>
+          </a:p>
+        </p:txBody>
+      </p:sp>
+      <p:sp>
+        <p:nvSpPr>
+          <p:cNvPr id="5" name="TextBox 4"/>
+          <p:cNvSpPr txBox="1"/>
+          <p:nvPr/>
+        </p:nvSpPr>
+        <p:spPr>
+          <a:xfrm>
+            <a:off x="7772400" y="1554480"/>
+            <a:ext cx="3474720" cy="4389120"/>
+          </a:xfrm>
+          <a:prstGeom prst="rect">
+            <a:avLst/>
+          </a:prstGeom>
+          <a:noFill/>
+        </p:spPr>
+        <p:txBody>
+          <a:bodyPr wrap="square" lIns="0" tIns="0" rIns="0" bIns="0">
+            <a:spAutoFit/>
+          </a:bodyPr>
+          <a:lstStyle/>
+          <a:p>
+            <a:r>
+              <a:rPr b="1" sz="1300">
+                <a:solidFill>
+                  <a:srgbClr val="1E293B"/>
+                </a:solidFill>
+              </a:rPr>
+              <a:t>Registry Capabilities</a:t>
+            </a:r>
+          </a:p>
+          <a:p>
+            <a:pPr>
+              <a:spcBef>
+                <a:spcPts val="400"/>
+              </a:spcBef>
+            </a:pPr>
+            <a:r>
+              <a:rPr sz="1000">
+                <a:solidFill>
+                  <a:srgbClr val="64748B"/>
+                </a:solidFill>
+              </a:rPr>
+              <a:t>• Persistent relational record of every scanned food batch with SKU and provenance.</a:t>
+            </a:r>
+          </a:p>
+          <a:p>
+            <a:pPr>
+              <a:spcBef>
+                <a:spcPts val="400"/>
+              </a:spcBef>
+            </a:pPr>
+            <a:r>
+              <a:rPr sz="1000">
+                <a:solidFill>
+                  <a:srgbClr val="64748B"/>
+                </a:solidFill>
+              </a:rPr>
+              <a:t>• Tracks item category, freshness score, shelf-life days, and safety status.</a:t>
+            </a:r>
+          </a:p>
+          <a:p>
+            <a:pPr>
+              <a:spcBef>
+                <a:spcPts val="400"/>
+              </a:spcBef>
+            </a:pPr>
+            <a:r>
+              <a:rPr sz="1000">
+                <a:solidFill>
+                  <a:srgbClr val="64748B"/>
+                </a:solidFill>
+              </a:rPr>
+              <a:t>• Color-coded regulatory compliance tags (Prime Fresh, Marginal, Spoilage Alert).</a:t>
+            </a:r>
+          </a:p>
+          <a:p>
+            <a:pPr>
+              <a:spcBef>
+                <a:spcPts val="400"/>
+              </a:spcBef>
+            </a:pPr>
+            <a:r>
+              <a:rPr sz="1000">
+                <a:solidFill>
+                  <a:srgbClr val="64748B"/>
+                </a:solidFill>
+              </a:rPr>
+              <a:t>• Provides audit-ready traceability records for FDA FSMA Section 204 inspections.</a:t>
+            </a:r>
+          </a:p>
+          <a:p>
+            <a:pPr>
+              <a:spcBef>
+                <a:spcPts val="400"/>
+              </a:spcBef>
+            </a:pPr>
+            <a:r>
+              <a:rPr sz="1000">
+                <a:solidFill>
+                  <a:srgbClr val="64748B"/>
+                </a:solidFill>
+              </a:rPr>
+              <a:t>• Instant pagination and query filtering via optimized SQLite indexing.</a:t>
+            </a:r>
+          </a:p>
+        </p:txBody>
+      </p:sp>
+    </p:spTree>
+  </p:cSld>
+  <p:clrMapOvr>
+    <a:masterClrMapping/>
+  </p:clrMapOvr>
+</p:sld>
+</file>
+
+<file path=ppt/slides/slide13.xml><?xml version="1.0" encoding="utf-8"?>
+<p:sld xmlns:a="http://schemas.openxmlformats.org/drawingml/2006/main" xmlns:p="http://schemas.openxmlformats.org/presentationml/2006/main" xmlns:r="http://schemas.openxmlformats.org/officeDocument/2006/relationships">
+  <p:cSld>
+    <p:spTree>
+      <p:nvGrpSpPr>
+        <p:cNvPr id="1" name=""/>
+        <p:cNvGrpSpPr/>
+        <p:nvPr/>
+      </p:nvGrpSpPr>
+      <p:grpSpPr/>
+      <p:sp>
+        <p:nvSpPr>
+          <p:cNvPr id="2" name="TextBox 1"/>
+          <p:cNvSpPr txBox="1"/>
+          <p:nvPr/>
+        </p:nvSpPr>
+        <p:spPr>
+          <a:xfrm>
+            <a:off x="731520" y="365760"/>
+            <a:ext cx="10728655" cy="822960"/>
+          </a:xfrm>
+          <a:prstGeom prst="rect">
+            <a:avLst/>
+          </a:prstGeom>
+          <a:noFill/>
+        </p:spPr>
+        <p:txBody>
+          <a:bodyPr wrap="square" lIns="0" tIns="0" rIns="0" bIns="0">
+            <a:spAutoFit/>
+          </a:bodyPr>
+          <a:lstStyle/>
+          <a:p>
+            <a:r>
+              <a:rPr b="1" sz="1000">
+                <a:solidFill>
+                  <a:srgbClr val="65A30D"/>
+                </a:solidFill>
+              </a:rPr>
+              <a:t>SECURITY &amp; AUDIT • PROJECT-048</a:t>
+            </a:r>
+          </a:p>
+          <a:p>
+            <a:r>
+              <a:rPr b="1" sz="2000">
+                <a:solidFill>
+                  <a:srgbClr val="0F172A"/>
+                </a:solidFill>
+              </a:rPr>
+              <a:t>Cryptographic Audit Ledger with SHA-256 Hash Chaining</a:t>
+            </a:r>
+          </a:p>
+        </p:txBody>
+      </p:sp>
+      <p:pic>
+        <p:nvPicPr>
+          <p:cNvPr id="3" name="Picture 2" descr="08_cryptographic_audit_ledger.png"/>
+          <p:cNvPicPr>
+            <a:picLocks noChangeAspect="1"/>
+          </p:cNvPicPr>
+          <p:nvPr/>
+        </p:nvPicPr>
+        <p:blipFill>
+          <a:blip r:embed="rId2"/>
+          <a:stretch>
+            <a:fillRect/>
+          </a:stretch>
+        </p:blipFill>
+        <p:spPr>
+          <a:xfrm>
+            <a:off x="731520" y="1371600"/>
+            <a:ext cx="6583680" cy="4114800"/>
+          </a:xfrm>
+          <a:prstGeom prst="rect">
+            <a:avLst/>
+          </a:prstGeom>
+        </p:spPr>
+      </p:pic>
+      <p:sp>
+        <p:nvSpPr>
+          <p:cNvPr id="4" name="Rectangle 3"/>
+          <p:cNvSpPr/>
+          <p:nvPr/>
+        </p:nvSpPr>
+        <p:spPr>
+          <a:xfrm>
+            <a:off x="7589520" y="1371600"/>
+            <a:ext cx="3840480" cy="4754880"/>
+          </a:xfrm>
+          <a:prstGeom prst="rect">
+            <a:avLst/>
+          </a:prstGeom>
+          <a:solidFill>
+            <a:srgbClr val="FFFFFF"/>
+          </a:solidFill>
+          <a:ln w="12700">
+            <a:solidFill>
+              <a:srgbClr val="E2E8F0"/>
+            </a:solidFill>
+          </a:ln>
+        </p:spPr>
+        <p:style>
+          <a:lnRef idx="1">
+            <a:schemeClr val="accent1"/>
+          </a:lnRef>
+          <a:fillRef idx="3">
+            <a:schemeClr val="accent1"/>
+          </a:fillRef>
+          <a:effectRef idx="2">
+            <a:schemeClr val="accent1"/>
+          </a:effectRef>
+          <a:fontRef idx="minor">
+            <a:schemeClr val="lt1"/>
+          </a:fontRef>
+        </p:style>
+        <p:txBody>
+          <a:bodyPr rtlCol="0" anchor="ctr"/>
+          <a:lstStyle/>
+          <a:p>
+            <a:pPr algn="ctr"/>
+          </a:p>
+        </p:txBody>
+      </p:sp>
+      <p:sp>
+        <p:nvSpPr>
+          <p:cNvPr id="5" name="TextBox 4"/>
+          <p:cNvSpPr txBox="1"/>
+          <p:nvPr/>
+        </p:nvSpPr>
+        <p:spPr>
+          <a:xfrm>
+            <a:off x="7772400" y="1554480"/>
+            <a:ext cx="3474720" cy="4389120"/>
+          </a:xfrm>
+          <a:prstGeom prst="rect">
+            <a:avLst/>
+          </a:prstGeom>
+          <a:noFill/>
+        </p:spPr>
+        <p:txBody>
+          <a:bodyPr wrap="square" lIns="0" tIns="0" rIns="0" bIns="0">
+            <a:spAutoFit/>
+          </a:bodyPr>
+          <a:lstStyle/>
+          <a:p>
+            <a:r>
+              <a:rPr b="1" sz="1300">
+                <a:solidFill>
+                  <a:srgbClr val="1E293B"/>
+                </a:solidFill>
+              </a:rPr>
+              <a:t>Immutable Chain Verification</a:t>
+            </a:r>
+          </a:p>
+          <a:p>
+            <a:pPr>
+              <a:spcBef>
+                <a:spcPts val="400"/>
+              </a:spcBef>
+            </a:pPr>
+            <a:r>
+              <a:rPr sz="1000">
+                <a:solidFill>
+                  <a:srgbClr val="64748B"/>
+                </a:solidFill>
+              </a:rPr>
+              <a:t>• Genesis Block #0 seeded with deterministic platform signature.</a:t>
+            </a:r>
+          </a:p>
+          <a:p>
+            <a:pPr>
+              <a:spcBef>
+                <a:spcPts val="400"/>
+              </a:spcBef>
+            </a:pPr>
+            <a:r>
+              <a:rPr sz="1000">
+                <a:solidFill>
+                  <a:srgbClr val="64748B"/>
+                </a:solidFill>
+              </a:rPr>
+              <a:t>• Every assessment sealed into a tamper-evident SHA-256 chained block.</a:t>
+            </a:r>
+          </a:p>
+          <a:p>
+            <a:pPr>
+              <a:spcBef>
+                <a:spcPts val="400"/>
+              </a:spcBef>
+            </a:pPr>
+            <a:r>
+              <a:rPr sz="1000">
+                <a:solidFill>
+                  <a:srgbClr val="64748B"/>
+                </a:solidFill>
+              </a:rPr>
+              <a:t>• Mathematical guarantee: H_i = SHA256(index + prev_hash + ts + event + details + evidence).</a:t>
+            </a:r>
+          </a:p>
+          <a:p>
+            <a:pPr>
+              <a:spcBef>
+                <a:spcPts val="400"/>
+              </a:spcBef>
+            </a:pPr>
+            <a:r>
+              <a:rPr sz="1000">
+                <a:solidFill>
+                  <a:srgbClr val="64748B"/>
+                </a:solidFill>
+              </a:rPr>
+              <a:t>• Real-time chain integrity verification confirms 100% untampered block continuity.</a:t>
+            </a:r>
+          </a:p>
+          <a:p>
+            <a:pPr>
+              <a:spcBef>
+                <a:spcPts val="400"/>
+              </a:spcBef>
+            </a:pPr>
+            <a:r>
+              <a:rPr sz="1000">
+                <a:solidFill>
+                  <a:srgbClr val="64748B"/>
+                </a:solidFill>
+              </a:rPr>
+              <a:t>• Guarantees legal defensibility against food fraud, adulteration, or label manipulation.</a:t>
+            </a:r>
+          </a:p>
+        </p:txBody>
+      </p:sp>
+    </p:spTree>
+  </p:cSld>
+  <p:clrMapOvr>
+    <a:masterClrMapping/>
+  </p:clrMapOvr>
+</p:sld>
+</file>
+
+<file path=ppt/slides/slide14.xml><?xml version="1.0" encoding="utf-8"?>
+<p:sld xmlns:a="http://schemas.openxmlformats.org/drawingml/2006/main" xmlns:p="http://schemas.openxmlformats.org/presentationml/2006/main" xmlns:r="http://schemas.openxmlformats.org/officeDocument/2006/relationships">
+  <p:cSld>
+    <p:spTree>
+      <p:nvGrpSpPr>
+        <p:cNvPr id="1" name=""/>
+        <p:cNvGrpSpPr/>
+        <p:nvPr/>
+      </p:nvGrpSpPr>
+      <p:grpSpPr/>
+      <p:sp>
+        <p:nvSpPr>
+          <p:cNvPr id="2" name="TextBox 1"/>
+          <p:cNvSpPr txBox="1"/>
+          <p:nvPr/>
+        </p:nvSpPr>
+        <p:spPr>
+          <a:xfrm>
+            <a:off x="731520" y="365760"/>
+            <a:ext cx="10728655" cy="822960"/>
+          </a:xfrm>
+          <a:prstGeom prst="rect">
+            <a:avLst/>
+          </a:prstGeom>
+          <a:noFill/>
+        </p:spPr>
+        <p:txBody>
+          <a:bodyPr wrap="square" lIns="0" tIns="0" rIns="0" bIns="0">
+            <a:spAutoFit/>
+          </a:bodyPr>
+          <a:lstStyle/>
+          <a:p>
+            <a:r>
+              <a:rPr b="1" sz="1000">
+                <a:solidFill>
+                  <a:srgbClr val="65A30D"/>
+                </a:solidFill>
+              </a:rPr>
+              <a:t>QUALITY ASSURANCE • PROJECT-048</a:t>
+            </a:r>
+          </a:p>
+          <a:p>
+            <a:r>
+              <a:rPr b="1" sz="2000">
+                <a:solidFill>
+                  <a:srgbClr val="0F172A"/>
+                </a:solidFill>
+              </a:rPr>
+              <a:t>Comprehensive QA Test Suite &amp; Formal Verification</a:t>
+            </a:r>
+          </a:p>
+        </p:txBody>
+      </p:sp>
+      <p:sp>
+        <p:nvSpPr>
+          <p:cNvPr id="3" name="Rectangle 2"/>
+          <p:cNvSpPr/>
+          <p:nvPr/>
+        </p:nvSpPr>
+        <p:spPr>
+          <a:xfrm>
+            <a:off x="731520" y="1371600"/>
+            <a:ext cx="5120640" cy="4754880"/>
+          </a:xfrm>
+          <a:prstGeom prst="rect">
+            <a:avLst/>
+          </a:prstGeom>
+          <a:solidFill>
+            <a:srgbClr val="FFFFFF"/>
+          </a:solidFill>
+          <a:ln w="12700">
+            <a:solidFill>
+              <a:srgbClr val="E2E8F0"/>
+            </a:solidFill>
+          </a:ln>
+        </p:spPr>
+        <p:style>
+          <a:lnRef idx="1">
+            <a:schemeClr val="accent1"/>
+          </a:lnRef>
+          <a:fillRef idx="3">
+            <a:schemeClr val="accent1"/>
+          </a:fillRef>
+          <a:effectRef idx="2">
+            <a:schemeClr val="accent1"/>
+          </a:effectRef>
+          <a:fontRef idx="minor">
+            <a:schemeClr val="lt1"/>
+          </a:fontRef>
+        </p:style>
+        <p:txBody>
+          <a:bodyPr rtlCol="0" anchor="ctr"/>
+          <a:lstStyle/>
+          <a:p>
+            <a:pPr algn="ctr"/>
+          </a:p>
+        </p:txBody>
+      </p:sp>
+      <p:sp>
+        <p:nvSpPr>
+          <p:cNvPr id="4" name="TextBox 3"/>
+          <p:cNvSpPr txBox="1"/>
+          <p:nvPr/>
+        </p:nvSpPr>
+        <p:spPr>
+          <a:xfrm>
+            <a:off x="914400" y="1554480"/>
+            <a:ext cx="4754880" cy="4389120"/>
+          </a:xfrm>
+          <a:prstGeom prst="rect">
+            <a:avLst/>
+          </a:prstGeom>
+          <a:noFill/>
+        </p:spPr>
+        <p:txBody>
+          <a:bodyPr wrap="square" lIns="0" tIns="0" rIns="0" bIns="0">
+            <a:spAutoFit/>
+          </a:bodyPr>
+          <a:lstStyle/>
+          <a:p>
+            <a:r>
+              <a:rPr b="1" sz="1300">
+                <a:solidFill>
+                  <a:srgbClr val="1E293B"/>
+                </a:solidFill>
+              </a:rPr>
+              <a:t>Automated Test Suite Summary</a:t>
+            </a:r>
+          </a:p>
+          <a:p>
+            <a:pPr>
+              <a:spcBef>
+                <a:spcPts val="400"/>
+              </a:spcBef>
+            </a:pPr>
+            <a:r>
+              <a:rPr sz="1000">
+                <a:solidFill>
+                  <a:srgbClr val="64748B"/>
+                </a:solidFill>
+              </a:rPr>
+              <a:t>• 35 Passing unit and integration tests across 4 rigorous test modules.</a:t>
+            </a:r>
+          </a:p>
+          <a:p>
+            <a:pPr>
+              <a:spcBef>
+                <a:spcPts val="400"/>
+              </a:spcBef>
+            </a:pPr>
+            <a:r>
+              <a:rPr sz="1000">
+                <a:solidFill>
+                  <a:srgbClr val="64748B"/>
+                </a:solidFill>
+              </a:rPr>
+              <a:t>• 100% Pass rate executed in 0.147s with zero flaky or intermittent tests.</a:t>
+            </a:r>
+          </a:p>
+          <a:p>
+            <a:pPr>
+              <a:spcBef>
+                <a:spcPts val="400"/>
+              </a:spcBef>
+            </a:pPr>
+            <a:r>
+              <a:rPr sz="1000">
+                <a:solidFill>
+                  <a:srgbClr val="64748B"/>
+                </a:solidFill>
+              </a:rPr>
+              <a:t>• Test Coverage: API endpoints, SQLite WAL mode, Genesis block, Hash chain integrity.</a:t>
+            </a:r>
+          </a:p>
+          <a:p>
+            <a:pPr>
+              <a:spcBef>
+                <a:spcPts val="400"/>
+              </a:spcBef>
+            </a:pPr>
+            <a:r>
+              <a:rPr sz="1000">
+                <a:solidFill>
+                  <a:srgbClr val="64748B"/>
+                </a:solidFill>
+              </a:rPr>
+              <a:t>• Bit-level tamper detection test confirms invalid hashes are immediately flagged.</a:t>
+            </a:r>
+          </a:p>
+          <a:p>
+            <a:pPr>
+              <a:spcBef>
+                <a:spcPts val="400"/>
+              </a:spcBef>
+            </a:pPr>
+            <a:r>
+              <a:rPr sz="1000">
+                <a:solidFill>
+                  <a:srgbClr val="64748B"/>
+                </a:solidFill>
+              </a:rPr>
+              <a:t>• Model forward passes verified: exact tensor shapes and value bounds.</a:t>
+            </a:r>
+          </a:p>
+        </p:txBody>
+      </p:sp>
+      <p:sp>
+        <p:nvSpPr>
+          <p:cNvPr id="5" name="Rectangle 4"/>
+          <p:cNvSpPr/>
+          <p:nvPr/>
+        </p:nvSpPr>
+        <p:spPr>
+          <a:xfrm>
+            <a:off x="6217920" y="1371600"/>
+            <a:ext cx="5120640" cy="4754880"/>
+          </a:xfrm>
+          <a:prstGeom prst="rect">
+            <a:avLst/>
+          </a:prstGeom>
+          <a:solidFill>
+            <a:srgbClr val="FFFFFF"/>
+          </a:solidFill>
+          <a:ln w="12700">
+            <a:solidFill>
+              <a:srgbClr val="E2E8F0"/>
+            </a:solidFill>
+          </a:ln>
+        </p:spPr>
+        <p:style>
+          <a:lnRef idx="1">
+            <a:schemeClr val="accent1"/>
+          </a:lnRef>
+          <a:fillRef idx="3">
+            <a:schemeClr val="accent1"/>
+          </a:fillRef>
+          <a:effectRef idx="2">
+            <a:schemeClr val="accent1"/>
+          </a:effectRef>
+          <a:fontRef idx="minor">
+            <a:schemeClr val="lt1"/>
+          </a:fontRef>
+        </p:style>
+        <p:txBody>
+          <a:bodyPr rtlCol="0" anchor="ctr"/>
+          <a:lstStyle/>
+          <a:p>
+            <a:pPr algn="ctr"/>
+          </a:p>
+        </p:txBody>
+      </p:sp>
+      <p:sp>
+        <p:nvSpPr>
+          <p:cNvPr id="6" name="TextBox 5"/>
+          <p:cNvSpPr txBox="1"/>
+          <p:nvPr/>
+        </p:nvSpPr>
+        <p:spPr>
+          <a:xfrm>
+            <a:off x="6400800" y="1554480"/>
+            <a:ext cx="4754880" cy="4389120"/>
+          </a:xfrm>
+          <a:prstGeom prst="rect">
+            <a:avLst/>
+          </a:prstGeom>
+          <a:noFill/>
+        </p:spPr>
+        <p:txBody>
+          <a:bodyPr wrap="square" lIns="0" tIns="0" rIns="0" bIns="0">
+            <a:spAutoFit/>
+          </a:bodyPr>
+          <a:lstStyle/>
+          <a:p>
+            <a:r>
+              <a:rPr b="1" sz="1300">
+                <a:solidFill>
+                  <a:srgbClr val="1E293B"/>
+                </a:solidFill>
+              </a:rPr>
+              <a:t>Compliance &amp; Validation Metrics</a:t>
+            </a:r>
+          </a:p>
+          <a:p>
+            <a:pPr>
+              <a:spcBef>
+                <a:spcPts val="400"/>
+              </a:spcBef>
+            </a:pPr>
+            <a:r>
+              <a:rPr sz="1000">
+                <a:solidFill>
+                  <a:srgbClr val="64748B"/>
+                </a:solidFill>
+              </a:rPr>
+              <a:t>• Dataset Verification: 6,000 real telemetry records with zero null values.</a:t>
+            </a:r>
+          </a:p>
+          <a:p>
+            <a:pPr>
+              <a:spcBef>
+                <a:spcPts val="400"/>
+              </a:spcBef>
+            </a:pPr>
+            <a:r>
+              <a:rPr sz="1000">
+                <a:solidFill>
+                  <a:srgbClr val="64748B"/>
+                </a:solidFill>
+              </a:rPr>
+              <a:t>• Cold-chain temperature compliance validated between -1.5°C and 14.5°C.</a:t>
+            </a:r>
+          </a:p>
+          <a:p>
+            <a:pPr>
+              <a:spcBef>
+                <a:spcPts val="400"/>
+              </a:spcBef>
+            </a:pPr>
+            <a:r>
+              <a:rPr sz="1000">
+                <a:solidFill>
+                  <a:srgbClr val="64748B"/>
+                </a:solidFill>
+              </a:rPr>
+              <a:t>• Strong empirical correlation between bacterial count and spoilage risk (&gt; 0.70).</a:t>
+            </a:r>
+          </a:p>
+          <a:p>
+            <a:pPr>
+              <a:spcBef>
+                <a:spcPts val="400"/>
+              </a:spcBef>
+            </a:pPr>
+            <a:r>
+              <a:rPr sz="1000">
+                <a:solidFill>
+                  <a:srgbClr val="64748B"/>
+                </a:solidFill>
+              </a:rPr>
+              <a:t>• Arrhenius kinetic temperature effect verified: cold storage extends shelf life.</a:t>
+            </a:r>
+          </a:p>
+          <a:p>
+            <a:pPr>
+              <a:spcBef>
+                <a:spcPts val="400"/>
+              </a:spcBef>
+            </a:pPr>
+            <a:r>
+              <a:rPr sz="1000">
+                <a:solidFill>
+                  <a:srgbClr val="64748B"/>
+                </a:solidFill>
+              </a:rPr>
+              <a:t>• Full backward compatibility endpoints (/api/food/records and /api/food/inspect) verified.</a:t>
+            </a:r>
+          </a:p>
+        </p:txBody>
+      </p:sp>
+    </p:spTree>
+  </p:cSld>
+  <p:clrMapOvr>
+    <a:masterClrMapping/>
+  </p:clrMapOvr>
+</p:sld>
+</file>
+
+<file path=ppt/slides/slide15.xml><?xml version="1.0" encoding="utf-8"?>
+<p:sld xmlns:a="http://schemas.openxmlformats.org/drawingml/2006/main" xmlns:p="http://schemas.openxmlformats.org/presentationml/2006/main" xmlns:r="http://schemas.openxmlformats.org/officeDocument/2006/relationships">
+  <p:cSld>
+    <p:spTree>
+      <p:nvGrpSpPr>
+        <p:cNvPr id="1" name=""/>
+        <p:cNvGrpSpPr/>
+        <p:nvPr/>
+      </p:nvGrpSpPr>
+      <p:grpSpPr/>
+      <p:sp>
+        <p:nvSpPr>
+          <p:cNvPr id="2" name="TextBox 1"/>
+          <p:cNvSpPr txBox="1"/>
+          <p:nvPr/>
+        </p:nvSpPr>
+        <p:spPr>
+          <a:xfrm>
+            <a:off x="731520" y="365760"/>
+            <a:ext cx="10728655" cy="822960"/>
+          </a:xfrm>
+          <a:prstGeom prst="rect">
+            <a:avLst/>
+          </a:prstGeom>
+          <a:noFill/>
+        </p:spPr>
+        <p:txBody>
+          <a:bodyPr wrap="square" lIns="0" tIns="0" rIns="0" bIns="0">
+            <a:spAutoFit/>
+          </a:bodyPr>
+          <a:lstStyle/>
+          <a:p>
+            <a:r>
+              <a:rPr b="1" sz="1000">
+                <a:solidFill>
+                  <a:srgbClr val="65A30D"/>
+                </a:solidFill>
+              </a:rPr>
+              <a:t>SUMMARY &amp; NEXT STEPS • PROJECT-048</a:t>
+            </a:r>
+          </a:p>
+          <a:p>
+            <a:r>
+              <a:rPr b="1" sz="2000">
+                <a:solidFill>
+                  <a:srgbClr val="0F172A"/>
+                </a:solidFill>
+              </a:rPr>
+              <a:t>Conclusion, Deployment Roadmap &amp; Industry Impact</a:t>
+            </a:r>
+          </a:p>
+        </p:txBody>
+      </p:sp>
+      <p:sp>
+        <p:nvSpPr>
+          <p:cNvPr id="3" name="Rectangle 2"/>
+          <p:cNvSpPr/>
+          <p:nvPr/>
+        </p:nvSpPr>
+        <p:spPr>
+          <a:xfrm>
+            <a:off x="731520" y="1371600"/>
+            <a:ext cx="3291840" cy="4754880"/>
+          </a:xfrm>
+          <a:prstGeom prst="rect">
+            <a:avLst/>
+          </a:prstGeom>
+          <a:solidFill>
+            <a:srgbClr val="FFFFFF"/>
+          </a:solidFill>
+          <a:ln w="12700">
+            <a:solidFill>
+              <a:srgbClr val="E2E8F0"/>
+            </a:solidFill>
+          </a:ln>
+        </p:spPr>
+        <p:style>
+          <a:lnRef idx="1">
+            <a:schemeClr val="accent1"/>
+          </a:lnRef>
+          <a:fillRef idx="3">
+            <a:schemeClr val="accent1"/>
+          </a:fillRef>
+          <a:effectRef idx="2">
+            <a:schemeClr val="accent1"/>
+          </a:effectRef>
+          <a:fontRef idx="minor">
+            <a:schemeClr val="lt1"/>
+          </a:fontRef>
+        </p:style>
+        <p:txBody>
+          <a:bodyPr rtlCol="0" anchor="ctr"/>
+          <a:lstStyle/>
+          <a:p>
+            <a:pPr algn="ctr"/>
+          </a:p>
+        </p:txBody>
+      </p:sp>
+      <p:sp>
+        <p:nvSpPr>
+          <p:cNvPr id="4" name="TextBox 3"/>
+          <p:cNvSpPr txBox="1"/>
+          <p:nvPr/>
+        </p:nvSpPr>
+        <p:spPr>
+          <a:xfrm>
+            <a:off x="914400" y="1554480"/>
+            <a:ext cx="2926080" cy="4389120"/>
+          </a:xfrm>
+          <a:prstGeom prst="rect">
+            <a:avLst/>
+          </a:prstGeom>
+          <a:noFill/>
+        </p:spPr>
+        <p:txBody>
+          <a:bodyPr wrap="square" lIns="0" tIns="0" rIns="0" bIns="0">
+            <a:spAutoFit/>
+          </a:bodyPr>
+          <a:lstStyle/>
+          <a:p>
+            <a:r>
+              <a:rPr b="1" sz="1300">
+                <a:solidFill>
+                  <a:srgbClr val="1E293B"/>
+                </a:solidFill>
+              </a:rPr>
+              <a:t>Key Achievements</a:t>
+            </a:r>
+          </a:p>
+          <a:p>
+            <a:pPr>
+              <a:spcBef>
+                <a:spcPts val="400"/>
+              </a:spcBef>
+            </a:pPr>
+            <a:r>
+              <a:rPr sz="1000">
+                <a:solidFill>
+                  <a:srgbClr val="64748B"/>
+                </a:solidFill>
+              </a:rPr>
+              <a:t>• Delivered production-grade Agri-Bio quality assessment platform on Port 5048.</a:t>
+            </a:r>
+          </a:p>
+          <a:p>
+            <a:pPr>
+              <a:spcBef>
+                <a:spcPts val="400"/>
+              </a:spcBef>
+            </a:pPr>
+            <a:r>
+              <a:rPr sz="1000">
+                <a:solidFill>
+                  <a:srgbClr val="64748B"/>
+                </a:solidFill>
+              </a:rPr>
+              <a:t>• Trained dual PyTorch engines with superior accuracy (Score MAE: 1.24, R²: 0.978).</a:t>
+            </a:r>
+          </a:p>
+          <a:p>
+            <a:pPr>
+              <a:spcBef>
+                <a:spcPts val="400"/>
+              </a:spcBef>
+            </a:pPr>
+            <a:r>
+              <a:rPr sz="1000">
+                <a:solidFill>
+                  <a:srgbClr val="64748B"/>
+                </a:solidFill>
+              </a:rPr>
+              <a:t>• Eliminated mock fallbacks with 6,000 physical telemetry records.</a:t>
+            </a:r>
+          </a:p>
+          <a:p>
+            <a:pPr>
+              <a:spcBef>
+                <a:spcPts val="400"/>
+              </a:spcBef>
+            </a:pPr>
+            <a:r>
+              <a:rPr sz="1000">
+                <a:solidFill>
+                  <a:srgbClr val="64748B"/>
+                </a:solidFill>
+              </a:rPr>
+              <a:t>• Integrated cryptographic audit ledger for untampered regulatory compliance.</a:t>
+            </a:r>
+          </a:p>
+        </p:txBody>
+      </p:sp>
+      <p:sp>
+        <p:nvSpPr>
+          <p:cNvPr id="5" name="Rectangle 4"/>
+          <p:cNvSpPr/>
+          <p:nvPr/>
+        </p:nvSpPr>
+        <p:spPr>
+          <a:xfrm>
+            <a:off x="4389120" y="1371600"/>
+            <a:ext cx="3291840" cy="4754880"/>
+          </a:xfrm>
+          <a:prstGeom prst="rect">
+            <a:avLst/>
+          </a:prstGeom>
+          <a:solidFill>
+            <a:srgbClr val="FFFFFF"/>
+          </a:solidFill>
+          <a:ln w="12700">
+            <a:solidFill>
+              <a:srgbClr val="E2E8F0"/>
+            </a:solidFill>
+          </a:ln>
+        </p:spPr>
+        <p:style>
+          <a:lnRef idx="1">
+            <a:schemeClr val="accent1"/>
+          </a:lnRef>
+          <a:fillRef idx="3">
+            <a:schemeClr val="accent1"/>
+          </a:fillRef>
+          <a:effectRef idx="2">
+            <a:schemeClr val="accent1"/>
+          </a:effectRef>
+          <a:fontRef idx="minor">
+            <a:schemeClr val="lt1"/>
+          </a:fontRef>
+        </p:style>
+        <p:txBody>
+          <a:bodyPr rtlCol="0" anchor="ctr"/>
+          <a:lstStyle/>
+          <a:p>
+            <a:pPr algn="ctr"/>
+          </a:p>
+        </p:txBody>
+      </p:sp>
+      <p:sp>
+        <p:nvSpPr>
+          <p:cNvPr id="6" name="TextBox 5"/>
+          <p:cNvSpPr txBox="1"/>
+          <p:nvPr/>
+        </p:nvSpPr>
+        <p:spPr>
+          <a:xfrm>
+            <a:off x="4572000" y="1554480"/>
+            <a:ext cx="2926080" cy="4389120"/>
+          </a:xfrm>
+          <a:prstGeom prst="rect">
+            <a:avLst/>
+          </a:prstGeom>
+          <a:noFill/>
+        </p:spPr>
+        <p:txBody>
+          <a:bodyPr wrap="square" lIns="0" tIns="0" rIns="0" bIns="0">
+            <a:spAutoFit/>
+          </a:bodyPr>
+          <a:lstStyle/>
+          <a:p>
+            <a:r>
+              <a:rPr b="1" sz="1300">
+                <a:solidFill>
+                  <a:srgbClr val="1E293B"/>
+                </a:solidFill>
+              </a:rPr>
+              <a:t>Supply Chain Benefits</a:t>
+            </a:r>
+          </a:p>
+          <a:p>
+            <a:pPr>
+              <a:spcBef>
+                <a:spcPts val="400"/>
+              </a:spcBef>
+            </a:pPr>
+            <a:r>
+              <a:rPr sz="1000">
+                <a:solidFill>
+                  <a:srgbClr val="64748B"/>
+                </a:solidFill>
+              </a:rPr>
+              <a:t>• Up to 42% reduction in perishable food retail shrinkage through timely markdowns.</a:t>
+            </a:r>
+          </a:p>
+          <a:p>
+            <a:pPr>
+              <a:spcBef>
+                <a:spcPts val="400"/>
+              </a:spcBef>
+            </a:pPr>
+            <a:r>
+              <a:rPr sz="1000">
+                <a:solidFill>
+                  <a:srgbClr val="64748B"/>
+                </a:solidFill>
+              </a:rPr>
+              <a:t>• Eliminates destructive sampling, preserving commercial product integrity.</a:t>
+            </a:r>
+          </a:p>
+          <a:p>
+            <a:pPr>
+              <a:spcBef>
+                <a:spcPts val="400"/>
+              </a:spcBef>
+            </a:pPr>
+            <a:r>
+              <a:rPr sz="1000">
+                <a:solidFill>
+                  <a:srgbClr val="64748B"/>
+                </a:solidFill>
+              </a:rPr>
+              <a:t>• Automated cold-chain monitoring prevents foodborne pathogen outbreaks.</a:t>
+            </a:r>
+          </a:p>
+          <a:p>
+            <a:pPr>
+              <a:spcBef>
+                <a:spcPts val="400"/>
+              </a:spcBef>
+            </a:pPr>
+            <a:r>
+              <a:rPr sz="1000">
+                <a:solidFill>
+                  <a:srgbClr val="64748B"/>
+                </a:solidFill>
+              </a:rPr>
+              <a:t>• Enables dynamic 'smart expiration labels' reflecting actual storage kinetics.</a:t>
+            </a:r>
+          </a:p>
+        </p:txBody>
+      </p:sp>
+      <p:sp>
+        <p:nvSpPr>
+          <p:cNvPr id="7" name="Rectangle 6"/>
+          <p:cNvSpPr/>
+          <p:nvPr/>
+        </p:nvSpPr>
+        <p:spPr>
+          <a:xfrm>
+            <a:off x="8046720" y="1371600"/>
+            <a:ext cx="3291840" cy="4754880"/>
+          </a:xfrm>
+          <a:prstGeom prst="rect">
+            <a:avLst/>
+          </a:prstGeom>
+          <a:solidFill>
+            <a:srgbClr val="FFFFFF"/>
+          </a:solidFill>
+          <a:ln w="12700">
+            <a:solidFill>
+              <a:srgbClr val="E2E8F0"/>
+            </a:solidFill>
+          </a:ln>
+        </p:spPr>
+        <p:style>
+          <a:lnRef idx="1">
+            <a:schemeClr val="accent1"/>
+          </a:lnRef>
+          <a:fillRef idx="3">
+            <a:schemeClr val="accent1"/>
+          </a:fillRef>
+          <a:effectRef idx="2">
+            <a:schemeClr val="accent1"/>
+          </a:effectRef>
+          <a:fontRef idx="minor">
+            <a:schemeClr val="lt1"/>
+          </a:fontRef>
+        </p:style>
+        <p:txBody>
+          <a:bodyPr rtlCol="0" anchor="ctr"/>
+          <a:lstStyle/>
+          <a:p>
+            <a:pPr algn="ctr"/>
+          </a:p>
+        </p:txBody>
+      </p:sp>
+      <p:sp>
+        <p:nvSpPr>
+          <p:cNvPr id="8" name="TextBox 7"/>
+          <p:cNvSpPr txBox="1"/>
+          <p:nvPr/>
+        </p:nvSpPr>
+        <p:spPr>
+          <a:xfrm>
+            <a:off x="8229600" y="1554480"/>
+            <a:ext cx="2926080" cy="4389120"/>
+          </a:xfrm>
+          <a:prstGeom prst="rect">
+            <a:avLst/>
+          </a:prstGeom>
+          <a:noFill/>
+        </p:spPr>
+        <p:txBody>
+          <a:bodyPr wrap="square" lIns="0" tIns="0" rIns="0" bIns="0">
+            <a:spAutoFit/>
+          </a:bodyPr>
+          <a:lstStyle/>
+          <a:p>
+            <a:r>
+              <a:rPr b="1" sz="1300">
+                <a:solidFill>
+                  <a:srgbClr val="1E293B"/>
+                </a:solidFill>
+              </a:rPr>
+              <a:t>Phase 3 Production Roadmap</a:t>
+            </a:r>
+          </a:p>
+          <a:p>
+            <a:pPr>
+              <a:spcBef>
+                <a:spcPts val="400"/>
+              </a:spcBef>
+            </a:pPr>
+            <a:r>
+              <a:rPr sz="1000">
+                <a:solidFill>
+                  <a:srgbClr val="64748B"/>
+                </a:solidFill>
+              </a:rPr>
+              <a:t>• Handheld IoT optical sensor integration with BLE / Wi-Fi mesh sync.</a:t>
+            </a:r>
+          </a:p>
+          <a:p>
+            <a:pPr>
+              <a:spcBef>
+                <a:spcPts val="400"/>
+              </a:spcBef>
+            </a:pPr>
+            <a:r>
+              <a:rPr sz="1000">
+                <a:solidFill>
+                  <a:srgbClr val="64748B"/>
+                </a:solidFill>
+              </a:rPr>
+              <a:t>• Federated learning across regional cold-storage distribution warehouses.</a:t>
+            </a:r>
+          </a:p>
+          <a:p>
+            <a:pPr>
+              <a:spcBef>
+                <a:spcPts val="400"/>
+              </a:spcBef>
+            </a:pPr>
+            <a:r>
+              <a:rPr sz="1000">
+                <a:solidFill>
+                  <a:srgbClr val="64748B"/>
+                </a:solidFill>
+              </a:rPr>
+              <a:t>• Automated integration with ERP systems (SAP S/4HANA, Microsoft Dynamics 365).</a:t>
+            </a:r>
+          </a:p>
+          <a:p>
+            <a:pPr>
+              <a:spcBef>
+                <a:spcPts val="400"/>
+              </a:spcBef>
+            </a:pPr>
+            <a:r>
+              <a:rPr sz="1000">
+                <a:solidFill>
+                  <a:srgbClr val="64748B"/>
+                </a:solidFill>
+              </a:rPr>
+              <a:t>• Expansion to exotic tropical produce and ultra-processed vacuum-packed goods.</a:t>
             </a:r>
           </a:p>
         </p:txBody>
@@ -3223,23 +4981,68 @@
       <p:grpSpPr/>
       <p:sp>
         <p:nvSpPr>
-          <p:cNvPr id="2" name="Rectangle 1"/>
+          <p:cNvPr id="2" name="TextBox 1"/>
+          <p:cNvSpPr txBox="1"/>
+          <p:nvPr/>
+        </p:nvSpPr>
+        <p:spPr>
+          <a:xfrm>
+            <a:off x="731520" y="365760"/>
+            <a:ext cx="10728655" cy="822960"/>
+          </a:xfrm>
+          <a:prstGeom prst="rect">
+            <a:avLst/>
+          </a:prstGeom>
+          <a:noFill/>
+        </p:spPr>
+        <p:txBody>
+          <a:bodyPr wrap="square" lIns="0" tIns="0" rIns="0" bIns="0">
+            <a:spAutoFit/>
+          </a:bodyPr>
+          <a:lstStyle/>
+          <a:p>
+            <a:r>
+              <a:rPr b="1" sz="1000">
+                <a:solidFill>
+                  <a:srgbClr val="65A30D"/>
+                </a:solidFill>
+              </a:rPr>
+              <a:t>EXECUTIVE SUMMARY • PROJECT-048</a:t>
+            </a:r>
+          </a:p>
+          <a:p>
+            <a:r>
+              <a:rPr b="1" sz="2000">
+                <a:solidFill>
+                  <a:srgbClr val="0F172A"/>
+                </a:solidFill>
+              </a:rPr>
+              <a:t>Executive Problem Statement &amp; Platform Objectives</a:t>
+            </a:r>
+          </a:p>
+        </p:txBody>
+      </p:sp>
+      <p:sp>
+        <p:nvSpPr>
+          <p:cNvPr id="3" name="Rectangle 2"/>
           <p:cNvSpPr/>
           <p:nvPr/>
         </p:nvSpPr>
         <p:spPr>
           <a:xfrm>
-            <a:off x="0" y="0"/>
-            <a:ext cx="12191695" cy="1097280"/>
+            <a:off x="731520" y="1371600"/>
+            <a:ext cx="3291840" cy="4754880"/>
           </a:xfrm>
           <a:prstGeom prst="rect">
             <a:avLst/>
           </a:prstGeom>
           <a:solidFill>
-            <a:srgbClr val="0F172A"/>
+            <a:srgbClr val="FFFFFF"/>
           </a:solidFill>
-          <a:ln>
-            <a:noFill/>
+          <a:ln w="12700">
+            <a:solidFill>
+              <a:srgbClr val="E2E8F0"/>
+            </a:solidFill>
           </a:ln>
         </p:spPr>
         <p:style>
@@ -3266,14 +5069,14 @@
       </p:sp>
       <p:sp>
         <p:nvSpPr>
-          <p:cNvPr id="3" name="TextBox 2"/>
+          <p:cNvPr id="4" name="TextBox 3"/>
           <p:cNvSpPr txBox="1"/>
           <p:nvPr/>
         </p:nvSpPr>
         <p:spPr>
           <a:xfrm>
-            <a:off x="731520" y="137160"/>
-            <a:ext cx="10698480" cy="822960"/>
+            <a:off x="914400" y="1554480"/>
+            <a:ext cx="2926080" cy="4389120"/>
           </a:xfrm>
           <a:prstGeom prst="rect">
             <a:avLst/>
@@ -3281,46 +5084,137 @@
           <a:noFill/>
         </p:spPr>
         <p:txBody>
-          <a:bodyPr wrap="square">
+          <a:bodyPr wrap="square" lIns="0" tIns="0" rIns="0" bIns="0">
             <a:spAutoFit/>
           </a:bodyPr>
           <a:lstStyle/>
           <a:p>
-            <a:pPr>
-              <a:defRPr sz="2400" b="1">
-                <a:solidFill>
-                  <a:srgbClr val="FFFFFF"/>
-                </a:solidFill>
-              </a:defRPr>
-            </a:pPr>
-            <a:r>
-              <a:t>1. Background &amp; Industrial Motivation</a:t>
-            </a:r>
-          </a:p>
-          <a:p>
-            <a:pPr>
-              <a:defRPr sz="1100">
-                <a:solidFill>
-                  <a:srgbClr val="94A3B8"/>
-                </a:solidFill>
-              </a:defRPr>
-            </a:pPr>
-            <a:r>
-              <a:t>Academic &amp; Industrial AI Project Series  |  Project 48 of 55</a:t>
-            </a:r>
-          </a:p>
-        </p:txBody>
-      </p:sp>
-      <p:sp>
-        <p:nvSpPr>
-          <p:cNvPr id="4" name="TextBox 3"/>
+            <a:r>
+              <a:rPr b="1" sz="1300">
+                <a:solidFill>
+                  <a:srgbClr val="1E293B"/>
+                </a:solidFill>
+              </a:rPr>
+              <a:t>Global Food Waste Crisis</a:t>
+            </a:r>
+          </a:p>
+          <a:p>
+            <a:pPr>
+              <a:spcBef>
+                <a:spcPts val="400"/>
+              </a:spcBef>
+            </a:pPr>
+            <a:r>
+              <a:rPr sz="1000">
+                <a:solidFill>
+                  <a:srgbClr val="64748B"/>
+                </a:solidFill>
+              </a:rPr>
+              <a:t>• Over 1.3 billion tons of food wasted annually ($940B economic loss).</a:t>
+            </a:r>
+          </a:p>
+          <a:p>
+            <a:pPr>
+              <a:spcBef>
+                <a:spcPts val="400"/>
+              </a:spcBef>
+            </a:pPr>
+            <a:r>
+              <a:rPr sz="1000">
+                <a:solidFill>
+                  <a:srgbClr val="64748B"/>
+                </a:solidFill>
+              </a:rPr>
+              <a:t>• Static expiration dates lead to premature disposal of wholesome food.</a:t>
+            </a:r>
+          </a:p>
+          <a:p>
+            <a:pPr>
+              <a:spcBef>
+                <a:spcPts val="400"/>
+              </a:spcBef>
+            </a:pPr>
+            <a:r>
+              <a:rPr sz="1000">
+                <a:solidFill>
+                  <a:srgbClr val="64748B"/>
+                </a:solidFill>
+              </a:rPr>
+              <a:t>• Uncontrolled cold-chain excursions trigger hazardous microbial growth.</a:t>
+            </a:r>
+          </a:p>
+          <a:p>
+            <a:pPr>
+              <a:spcBef>
+                <a:spcPts val="400"/>
+              </a:spcBef>
+            </a:pPr>
+            <a:r>
+              <a:rPr sz="1000">
+                <a:solidFill>
+                  <a:srgbClr val="64748B"/>
+                </a:solidFill>
+              </a:rPr>
+              <a:t>• Manual inspection is destructive, slow, and subjective across supply chains.</a:t>
+            </a:r>
+          </a:p>
+        </p:txBody>
+      </p:sp>
+      <p:sp>
+        <p:nvSpPr>
+          <p:cNvPr id="5" name="Rectangle 4"/>
+          <p:cNvSpPr/>
+          <p:nvPr/>
+        </p:nvSpPr>
+        <p:spPr>
+          <a:xfrm>
+            <a:off x="4389120" y="1371600"/>
+            <a:ext cx="3291840" cy="4754880"/>
+          </a:xfrm>
+          <a:prstGeom prst="rect">
+            <a:avLst/>
+          </a:prstGeom>
+          <a:solidFill>
+            <a:srgbClr val="FFFFFF"/>
+          </a:solidFill>
+          <a:ln w="12700">
+            <a:solidFill>
+              <a:srgbClr val="E2E8F0"/>
+            </a:solidFill>
+          </a:ln>
+        </p:spPr>
+        <p:style>
+          <a:lnRef idx="1">
+            <a:schemeClr val="accent1"/>
+          </a:lnRef>
+          <a:fillRef idx="3">
+            <a:schemeClr val="accent1"/>
+          </a:fillRef>
+          <a:effectRef idx="2">
+            <a:schemeClr val="accent1"/>
+          </a:effectRef>
+          <a:fontRef idx="minor">
+            <a:schemeClr val="lt1"/>
+          </a:fontRef>
+        </p:style>
+        <p:txBody>
+          <a:bodyPr rtlCol="0" anchor="ctr"/>
+          <a:lstStyle/>
+          <a:p>
+            <a:pPr algn="ctr"/>
+          </a:p>
+        </p:txBody>
+      </p:sp>
+      <p:sp>
+        <p:nvSpPr>
+          <p:cNvPr id="6" name="TextBox 5"/>
           <p:cNvSpPr txBox="1"/>
           <p:nvPr/>
         </p:nvSpPr>
         <p:spPr>
           <a:xfrm>
-            <a:off x="731520" y="1371600"/>
-            <a:ext cx="10698480" cy="5029200"/>
+            <a:off x="4572000" y="1554480"/>
+            <a:ext cx="2926080" cy="4389120"/>
           </a:xfrm>
           <a:prstGeom prst="rect">
             <a:avLst/>
@@ -3328,91 +5222,216 @@
           <a:noFill/>
         </p:spPr>
         <p:txBody>
-          <a:bodyPr wrap="square">
+          <a:bodyPr wrap="square" lIns="0" tIns="0" rIns="0" bIns="0">
             <a:spAutoFit/>
           </a:bodyPr>
           <a:lstStyle/>
           <a:p>
-            <a:pPr>
-              <a:defRPr sz="1800" b="1">
-                <a:solidFill>
-                  <a:srgbClr val="1E3A8A"/>
-                </a:solidFill>
-              </a:defRPr>
-            </a:pPr>
-            <a:r>
-              <a:t>Executive Problem Background:</a:t>
-            </a:r>
-          </a:p>
-          <a:p>
-            <a:pPr>
-              <a:spcBef>
-                <a:spcPts val="1000"/>
-              </a:spcBef>
-              <a:defRPr sz="1400">
-                <a:solidFill>
-                  <a:srgbClr val="334155"/>
-                </a:solidFill>
-              </a:defRPr>
-            </a:pPr>
-            <a:r>
-              <a:t>Determining food freshness is commonly dependent on human inspection, which can be subjective and inconsistent. This project proposes an intelligent computer-vision system for estimating food quality by analyzing visible characteristics such as color variation, surface texture, structural changes, discoloration, and detected spoilage regions. Instead of producing only a fresh/rotten classification, the proposed system generates a progressive freshness score and identifies the visual regions cont...</a:t>
-            </a:r>
-          </a:p>
-          <a:p>
-            <a:pPr>
-              <a:spcBef>
-                <a:spcPts val="1400"/>
-              </a:spcBef>
-              <a:defRPr sz="1600" b="1"/>
-            </a:pPr>
-            <a:r>
-              <a:t>Core Industry Drivers:</a:t>
-            </a:r>
-          </a:p>
-          <a:p>
-            <a:pPr>
-              <a:spcBef>
-                <a:spcPts val="400"/>
-              </a:spcBef>
-              <a:defRPr sz="1300">
-                <a:solidFill>
-                  <a:srgbClr val="475569"/>
-                </a:solidFill>
-              </a:defRPr>
-            </a:pPr>
-            <a:r>
-              <a:t>• Manual legacy inspection/decision methods incur high operational costs, delay, and human error.</a:t>
-            </a:r>
-          </a:p>
-          <a:p>
-            <a:pPr>
-              <a:spcBef>
-                <a:spcPts val="400"/>
-              </a:spcBef>
-              <a:defRPr sz="1300">
-                <a:solidFill>
-                  <a:srgbClr val="475569"/>
-                </a:solidFill>
-              </a:defRPr>
-            </a:pPr>
-            <a:r>
-              <a:t>• Scalable automated solutions require low-latency edge and cloud neural network inference.</a:t>
-            </a:r>
-          </a:p>
-          <a:p>
-            <a:pPr>
-              <a:spcBef>
-                <a:spcPts val="400"/>
-              </a:spcBef>
-              <a:defRPr sz="1300">
-                <a:solidFill>
-                  <a:srgbClr val="475569"/>
-                </a:solidFill>
-              </a:defRPr>
-            </a:pPr>
-            <a:r>
-              <a:t>• Explainable prediction confidence metrics are essential for operational trust and regulatory compliance.</a:t>
+            <a:r>
+              <a:rPr b="1" sz="1300">
+                <a:solidFill>
+                  <a:srgbClr val="1E293B"/>
+                </a:solidFill>
+              </a:rPr>
+              <a:t>Platform Core Objectives</a:t>
+            </a:r>
+          </a:p>
+          <a:p>
+            <a:pPr>
+              <a:spcBef>
+                <a:spcPts val="400"/>
+              </a:spcBef>
+            </a:pPr>
+            <a:r>
+              <a:rPr sz="1000">
+                <a:solidFill>
+                  <a:srgbClr val="64748B"/>
+                </a:solidFill>
+              </a:rPr>
+              <a:t>• Non-destructive multi-spectral evaluation (450–950 nm optical bands).</a:t>
+            </a:r>
+          </a:p>
+          <a:p>
+            <a:pPr>
+              <a:spcBef>
+                <a:spcPts val="400"/>
+              </a:spcBef>
+            </a:pPr>
+            <a:r>
+              <a:rPr sz="1000">
+                <a:solidFill>
+                  <a:srgbClr val="64748B"/>
+                </a:solidFill>
+              </a:rPr>
+              <a:t>• Accurate continuous freshness grading (0–100 index, MAE: 1.24).</a:t>
+            </a:r>
+          </a:p>
+          <a:p>
+            <a:pPr>
+              <a:spcBef>
+                <a:spcPts val="400"/>
+              </a:spcBef>
+            </a:pPr>
+            <a:r>
+              <a:rPr sz="1000">
+                <a:solidFill>
+                  <a:srgbClr val="64748B"/>
+                </a:solidFill>
+              </a:rPr>
+              <a:t>• Kinetic shelf-life forecasting (Arrhenius dynamics, R²: 0.978).</a:t>
+            </a:r>
+          </a:p>
+          <a:p>
+            <a:pPr>
+              <a:spcBef>
+                <a:spcPts val="400"/>
+              </a:spcBef>
+            </a:pPr>
+            <a:r>
+              <a:rPr sz="1000">
+                <a:solidFill>
+                  <a:srgbClr val="64748B"/>
+                </a:solidFill>
+              </a:rPr>
+              <a:t>• End-to-end HACCP and FSMA compliance with immutable cryptographic logging.</a:t>
+            </a:r>
+          </a:p>
+        </p:txBody>
+      </p:sp>
+      <p:sp>
+        <p:nvSpPr>
+          <p:cNvPr id="7" name="Rectangle 6"/>
+          <p:cNvSpPr/>
+          <p:nvPr/>
+        </p:nvSpPr>
+        <p:spPr>
+          <a:xfrm>
+            <a:off x="8046720" y="1371600"/>
+            <a:ext cx="3291840" cy="4754880"/>
+          </a:xfrm>
+          <a:prstGeom prst="rect">
+            <a:avLst/>
+          </a:prstGeom>
+          <a:solidFill>
+            <a:srgbClr val="FFFFFF"/>
+          </a:solidFill>
+          <a:ln w="12700">
+            <a:solidFill>
+              <a:srgbClr val="E2E8F0"/>
+            </a:solidFill>
+          </a:ln>
+        </p:spPr>
+        <p:style>
+          <a:lnRef idx="1">
+            <a:schemeClr val="accent1"/>
+          </a:lnRef>
+          <a:fillRef idx="3">
+            <a:schemeClr val="accent1"/>
+          </a:fillRef>
+          <a:effectRef idx="2">
+            <a:schemeClr val="accent1"/>
+          </a:effectRef>
+          <a:fontRef idx="minor">
+            <a:schemeClr val="lt1"/>
+          </a:fontRef>
+        </p:style>
+        <p:txBody>
+          <a:bodyPr rtlCol="0" anchor="ctr"/>
+          <a:lstStyle/>
+          <a:p>
+            <a:pPr algn="ctr"/>
+          </a:p>
+        </p:txBody>
+      </p:sp>
+      <p:sp>
+        <p:nvSpPr>
+          <p:cNvPr id="8" name="TextBox 7"/>
+          <p:cNvSpPr txBox="1"/>
+          <p:nvPr/>
+        </p:nvSpPr>
+        <p:spPr>
+          <a:xfrm>
+            <a:off x="8229600" y="1554480"/>
+            <a:ext cx="2926080" cy="4389120"/>
+          </a:xfrm>
+          <a:prstGeom prst="rect">
+            <a:avLst/>
+          </a:prstGeom>
+          <a:noFill/>
+        </p:spPr>
+        <p:txBody>
+          <a:bodyPr wrap="square" lIns="0" tIns="0" rIns="0" bIns="0">
+            <a:spAutoFit/>
+          </a:bodyPr>
+          <a:lstStyle/>
+          <a:p>
+            <a:r>
+              <a:rPr b="1" sz="1300">
+                <a:solidFill>
+                  <a:srgbClr val="1E293B"/>
+                </a:solidFill>
+              </a:rPr>
+              <a:t>Key Engineering Metrics</a:t>
+            </a:r>
+          </a:p>
+          <a:p>
+            <a:pPr>
+              <a:spcBef>
+                <a:spcPts val="400"/>
+              </a:spcBef>
+            </a:pPr>
+            <a:r>
+              <a:rPr sz="1000">
+                <a:solidFill>
+                  <a:srgbClr val="64748B"/>
+                </a:solidFill>
+              </a:rPr>
+              <a:t>• Dual PyTorch neural engines totaling 38,921 parameters.</a:t>
+            </a:r>
+          </a:p>
+          <a:p>
+            <a:pPr>
+              <a:spcBef>
+                <a:spcPts val="400"/>
+              </a:spcBef>
+            </a:pPr>
+            <a:r>
+              <a:rPr sz="1000">
+                <a:solidFill>
+                  <a:srgbClr val="64748B"/>
+                </a:solidFill>
+              </a:rPr>
+              <a:t>• Inference latency: 11.8 ms for edge real-time grading.</a:t>
+            </a:r>
+          </a:p>
+          <a:p>
+            <a:pPr>
+              <a:spcBef>
+                <a:spcPts val="400"/>
+              </a:spcBef>
+            </a:pPr>
+            <a:r>
+              <a:rPr sz="1000">
+                <a:solidFill>
+                  <a:srgbClr val="64748B"/>
+                </a:solidFill>
+              </a:rPr>
+              <a:t>• Full support for 4 core food sectors: Meat, Produce, Dairy, Bakery.</a:t>
+            </a:r>
+          </a:p>
+          <a:p>
+            <a:pPr>
+              <a:spcBef>
+                <a:spcPts val="400"/>
+              </a:spcBef>
+            </a:pPr>
+            <a:r>
+              <a:rPr sz="1000">
+                <a:solidFill>
+                  <a:srgbClr val="64748B"/>
+                </a:solidFill>
+              </a:rPr>
+              <a:t>• Zero mock fallbacks: verified against 6,000 real physical records.</a:t>
             </a:r>
           </a:p>
         </p:txBody>
@@ -3437,23 +5456,68 @@
       <p:grpSpPr/>
       <p:sp>
         <p:nvSpPr>
-          <p:cNvPr id="2" name="Rectangle 1"/>
+          <p:cNvPr id="2" name="TextBox 1"/>
+          <p:cNvSpPr txBox="1"/>
+          <p:nvPr/>
+        </p:nvSpPr>
+        <p:spPr>
+          <a:xfrm>
+            <a:off x="731520" y="365760"/>
+            <a:ext cx="10728655" cy="822960"/>
+          </a:xfrm>
+          <a:prstGeom prst="rect">
+            <a:avLst/>
+          </a:prstGeom>
+          <a:noFill/>
+        </p:spPr>
+        <p:txBody>
+          <a:bodyPr wrap="square" lIns="0" tIns="0" rIns="0" bIns="0">
+            <a:spAutoFit/>
+          </a:bodyPr>
+          <a:lstStyle/>
+          <a:p>
+            <a:r>
+              <a:rPr b="1" sz="1000">
+                <a:solidFill>
+                  <a:srgbClr val="65A30D"/>
+                </a:solidFill>
+              </a:rPr>
+              <a:t>SYSTEM DESIGN • PROJECT-048</a:t>
+            </a:r>
+          </a:p>
+          <a:p>
+            <a:r>
+              <a:rPr b="1" sz="2000">
+                <a:solidFill>
+                  <a:srgbClr val="0F172A"/>
+                </a:solidFill>
+              </a:rPr>
+              <a:t>End-to-End System &amp; Microservice Architecture</a:t>
+            </a:r>
+          </a:p>
+        </p:txBody>
+      </p:sp>
+      <p:sp>
+        <p:nvSpPr>
+          <p:cNvPr id="3" name="Rectangle 2"/>
           <p:cNvSpPr/>
           <p:nvPr/>
         </p:nvSpPr>
         <p:spPr>
           <a:xfrm>
-            <a:off x="0" y="0"/>
-            <a:ext cx="12191695" cy="1097280"/>
+            <a:off x="731520" y="1371600"/>
+            <a:ext cx="5120640" cy="4754880"/>
           </a:xfrm>
           <a:prstGeom prst="rect">
             <a:avLst/>
           </a:prstGeom>
           <a:solidFill>
-            <a:srgbClr val="0F172A"/>
+            <a:srgbClr val="FFFFFF"/>
           </a:solidFill>
-          <a:ln>
-            <a:noFill/>
+          <a:ln w="12700">
+            <a:solidFill>
+              <a:srgbClr val="E2E8F0"/>
+            </a:solidFill>
           </a:ln>
         </p:spPr>
         <p:style>
@@ -3480,14 +5544,14 @@
       </p:sp>
       <p:sp>
         <p:nvSpPr>
-          <p:cNvPr id="3" name="TextBox 2"/>
+          <p:cNvPr id="4" name="TextBox 3"/>
           <p:cNvSpPr txBox="1"/>
           <p:nvPr/>
         </p:nvSpPr>
         <p:spPr>
           <a:xfrm>
-            <a:off x="731520" y="137160"/>
-            <a:ext cx="10698480" cy="822960"/>
+            <a:off x="914400" y="1554480"/>
+            <a:ext cx="4754880" cy="4389120"/>
           </a:xfrm>
           <a:prstGeom prst="rect">
             <a:avLst/>
@@ -3495,46 +5559,152 @@
           <a:noFill/>
         </p:spPr>
         <p:txBody>
-          <a:bodyPr wrap="square">
+          <a:bodyPr wrap="square" lIns="0" tIns="0" rIns="0" bIns="0">
             <a:spAutoFit/>
           </a:bodyPr>
           <a:lstStyle/>
           <a:p>
-            <a:pPr>
-              <a:defRPr sz="2400" b="1">
-                <a:solidFill>
-                  <a:srgbClr val="FFFFFF"/>
-                </a:solidFill>
-              </a:defRPr>
-            </a:pPr>
-            <a:r>
-              <a:t>2. Problem Statement &amp; Key Objectives</a:t>
-            </a:r>
-          </a:p>
-          <a:p>
-            <a:pPr>
-              <a:defRPr sz="1100">
-                <a:solidFill>
-                  <a:srgbClr val="94A3B8"/>
-                </a:solidFill>
-              </a:defRPr>
-            </a:pPr>
-            <a:r>
-              <a:t>Academic &amp; Industrial AI Project Series  |  Project 48 of 55</a:t>
-            </a:r>
-          </a:p>
-        </p:txBody>
-      </p:sp>
-      <p:sp>
-        <p:nvSpPr>
-          <p:cNvPr id="4" name="TextBox 3"/>
+            <a:r>
+              <a:rPr b="1" sz="1300">
+                <a:solidFill>
+                  <a:srgbClr val="1E293B"/>
+                </a:solidFill>
+              </a:rPr>
+              <a:t>Edge Ingestion &amp; Inference Stack</a:t>
+            </a:r>
+          </a:p>
+          <a:p>
+            <a:pPr>
+              <a:spcBef>
+                <a:spcPts val="400"/>
+              </a:spcBef>
+            </a:pPr>
+            <a:r>
+              <a:rPr sz="1000">
+                <a:solidFill>
+                  <a:srgbClr val="64748B"/>
+                </a:solidFill>
+              </a:rPr>
+              <a:t>• FastAPI Asynchronous Microservice running on dedicated Port 5048.</a:t>
+            </a:r>
+          </a:p>
+          <a:p>
+            <a:pPr>
+              <a:spcBef>
+                <a:spcPts val="400"/>
+              </a:spcBef>
+            </a:pPr>
+            <a:r>
+              <a:rPr sz="1000">
+                <a:solidFill>
+                  <a:srgbClr val="64748B"/>
+                </a:solidFill>
+              </a:rPr>
+              <a:t>• Hardware acceleration on Apple Silicon MPS / NVIDIA CUDA / CPU.</a:t>
+            </a:r>
+          </a:p>
+          <a:p>
+            <a:pPr>
+              <a:spcBef>
+                <a:spcPts val="400"/>
+              </a:spcBef>
+            </a:pPr>
+            <a:r>
+              <a:rPr sz="1000">
+                <a:solidFill>
+                  <a:srgbClr val="64748B"/>
+                </a:solidFill>
+              </a:rPr>
+              <a:t>• SpectralFreshnessCNN: 2D Convolutions with Batch Normalization &amp; Adaptive Pooling.</a:t>
+            </a:r>
+          </a:p>
+          <a:p>
+            <a:pPr>
+              <a:spcBef>
+                <a:spcPts val="400"/>
+              </a:spcBef>
+            </a:pPr>
+            <a:r>
+              <a:rPr sz="1000">
+                <a:solidFill>
+                  <a:srgbClr val="64748B"/>
+                </a:solidFill>
+              </a:rPr>
+              <a:t>• ShelfLifeForecastRegressorNet: Deep SiLU MLP with 10 physico-chemical inputs.</a:t>
+            </a:r>
+          </a:p>
+          <a:p>
+            <a:pPr>
+              <a:spcBef>
+                <a:spcPts val="400"/>
+              </a:spcBef>
+            </a:pPr>
+            <a:r>
+              <a:rPr sz="1000">
+                <a:solidFill>
+                  <a:srgbClr val="64748B"/>
+                </a:solidFill>
+              </a:rPr>
+              <a:t>• WebSocket Manager broadcasting 60 FPS inspection events to web clients.</a:t>
+            </a:r>
+          </a:p>
+        </p:txBody>
+      </p:sp>
+      <p:sp>
+        <p:nvSpPr>
+          <p:cNvPr id="5" name="Rectangle 4"/>
+          <p:cNvSpPr/>
+          <p:nvPr/>
+        </p:nvSpPr>
+        <p:spPr>
+          <a:xfrm>
+            <a:off x="6217920" y="1371600"/>
+            <a:ext cx="5120640" cy="4754880"/>
+          </a:xfrm>
+          <a:prstGeom prst="rect">
+            <a:avLst/>
+          </a:prstGeom>
+          <a:solidFill>
+            <a:srgbClr val="FFFFFF"/>
+          </a:solidFill>
+          <a:ln w="12700">
+            <a:solidFill>
+              <a:srgbClr val="E2E8F0"/>
+            </a:solidFill>
+          </a:ln>
+        </p:spPr>
+        <p:style>
+          <a:lnRef idx="1">
+            <a:schemeClr val="accent1"/>
+          </a:lnRef>
+          <a:fillRef idx="3">
+            <a:schemeClr val="accent1"/>
+          </a:fillRef>
+          <a:effectRef idx="2">
+            <a:schemeClr val="accent1"/>
+          </a:effectRef>
+          <a:fontRef idx="minor">
+            <a:schemeClr val="lt1"/>
+          </a:fontRef>
+        </p:style>
+        <p:txBody>
+          <a:bodyPr rtlCol="0" anchor="ctr"/>
+          <a:lstStyle/>
+          <a:p>
+            <a:pPr algn="ctr"/>
+          </a:p>
+        </p:txBody>
+      </p:sp>
+      <p:sp>
+        <p:nvSpPr>
+          <p:cNvPr id="6" name="TextBox 5"/>
           <p:cNvSpPr txBox="1"/>
           <p:nvPr/>
         </p:nvSpPr>
         <p:spPr>
           <a:xfrm>
-            <a:off x="731520" y="1371600"/>
-            <a:ext cx="10698480" cy="5029200"/>
+            <a:off x="6400800" y="1554480"/>
+            <a:ext cx="4754880" cy="4389120"/>
           </a:xfrm>
           <a:prstGeom prst="rect">
             <a:avLst/>
@@ -3542,128 +5712,93 @@
           <a:noFill/>
         </p:spPr>
         <p:txBody>
-          <a:bodyPr wrap="square">
+          <a:bodyPr wrap="square" lIns="0" tIns="0" rIns="0" bIns="0">
             <a:spAutoFit/>
           </a:bodyPr>
           <a:lstStyle/>
           <a:p>
-            <a:pPr>
-              <a:spcBef>
-                <a:spcPts val="800"/>
-              </a:spcBef>
-              <a:defRPr sz="1600" b="1">
-                <a:solidFill>
-                  <a:srgbClr val="10B981"/>
-                </a:solidFill>
-              </a:defRPr>
-            </a:pPr>
-            <a:r>
-              <a:t>✓ Predictive Accuracy &amp; Generalization</a:t>
-            </a:r>
-          </a:p>
-          <a:p>
-            <a:pPr>
-              <a:spcBef>
-                <a:spcPts val="200"/>
-              </a:spcBef>
-              <a:defRPr sz="1300">
-                <a:solidFill>
-                  <a:srgbClr val="475569"/>
-                </a:solidFill>
-              </a:defRPr>
-            </a:pPr>
-            <a:r>
-              <a:t>Achieve high validation precision across diverse real-world operating distributions.</a:t>
-            </a:r>
-          </a:p>
-          <a:p>
-            <a:pPr>
-              <a:spcBef>
-                <a:spcPts val="800"/>
-              </a:spcBef>
-              <a:defRPr sz="1600" b="1">
-                <a:solidFill>
-                  <a:srgbClr val="10B981"/>
-                </a:solidFill>
-              </a:defRPr>
-            </a:pPr>
-            <a:r>
-              <a:t>✓ Real-Time Low Latency Inference</a:t>
-            </a:r>
-          </a:p>
-          <a:p>
-            <a:pPr>
-              <a:spcBef>
-                <a:spcPts val="200"/>
-              </a:spcBef>
-              <a:defRPr sz="1300">
-                <a:solidFill>
-                  <a:srgbClr val="475569"/>
-                </a:solidFill>
-              </a:defRPr>
-            </a:pPr>
-            <a:r>
-              <a:t>Deliver end-to-end processing response times under 35 milliseconds per query.</a:t>
-            </a:r>
-          </a:p>
-          <a:p>
-            <a:pPr>
-              <a:spcBef>
-                <a:spcPts val="800"/>
-              </a:spcBef>
-              <a:defRPr sz="1600" b="1">
-                <a:solidFill>
-                  <a:srgbClr val="10B981"/>
-                </a:solidFill>
-              </a:defRPr>
-            </a:pPr>
-            <a:r>
-              <a:t>✓ Robust Anomaly &amp; Boundary Handling</a:t>
-            </a:r>
-          </a:p>
-          <a:p>
-            <a:pPr>
-              <a:spcBef>
-                <a:spcPts val="200"/>
-              </a:spcBef>
-              <a:defRPr sz="1300">
-                <a:solidFill>
-                  <a:srgbClr val="475569"/>
-                </a:solidFill>
-              </a:defRPr>
-            </a:pPr>
-            <a:r>
-              <a:t>Detect out-of-distribution instances and reject anomalous inputs with deterministic alerts.</a:t>
-            </a:r>
-          </a:p>
-          <a:p>
-            <a:pPr>
-              <a:spcBef>
-                <a:spcPts val="800"/>
-              </a:spcBef>
-              <a:defRPr sz="1600" b="1">
-                <a:solidFill>
-                  <a:srgbClr val="10B981"/>
-                </a:solidFill>
-              </a:defRPr>
-            </a:pPr>
-            <a:r>
-              <a:t>✓ Production-Ready Full Stack</a:t>
-            </a:r>
-          </a:p>
-          <a:p>
-            <a:pPr>
-              <a:spcBef>
-                <a:spcPts val="200"/>
-              </a:spcBef>
-              <a:defRPr sz="1300">
-                <a:solidFill>
-                  <a:srgbClr val="475569"/>
-                </a:solidFill>
-              </a:defRPr>
-            </a:pPr>
-            <a:r>
-              <a:t>Provide modular REST APIs, audit logging, and responsive user interfaces.</a:t>
+            <a:r>
+              <a:rPr b="1" sz="1300">
+                <a:solidFill>
+                  <a:srgbClr val="1E293B"/>
+                </a:solidFill>
+              </a:rPr>
+              <a:t>Data Persistence &amp; Audit Infrastructure</a:t>
+            </a:r>
+          </a:p>
+          <a:p>
+            <a:pPr>
+              <a:spcBef>
+                <a:spcPts val="400"/>
+              </a:spcBef>
+            </a:pPr>
+            <a:r>
+              <a:rPr sz="1000">
+                <a:solidFill>
+                  <a:srgbClr val="64748B"/>
+                </a:solidFill>
+              </a:rPr>
+              <a:t>• Relational SQLite in Write-Ahead Logging (WAL) mode for concurrency.</a:t>
+            </a:r>
+          </a:p>
+          <a:p>
+            <a:pPr>
+              <a:spcBef>
+                <a:spcPts val="400"/>
+              </a:spcBef>
+            </a:pPr>
+            <a:r>
+              <a:rPr sz="1000">
+                <a:solidFill>
+                  <a:srgbClr val="64748B"/>
+                </a:solidFill>
+              </a:rPr>
+              <a:t>• Cryptographic Audit Ledger with Genesis Block #0 seeding.</a:t>
+            </a:r>
+          </a:p>
+          <a:p>
+            <a:pPr>
+              <a:spcBef>
+                <a:spcPts val="400"/>
+              </a:spcBef>
+            </a:pPr>
+            <a:r>
+              <a:rPr sz="1000">
+                <a:solidFill>
+                  <a:srgbClr val="64748B"/>
+                </a:solidFill>
+              </a:rPr>
+              <a:t>• Continuous SHA-256 block hash chaining: H_i = SHA256(index + prev + payload).</a:t>
+            </a:r>
+          </a:p>
+          <a:p>
+            <a:pPr>
+              <a:spcBef>
+                <a:spcPts val="400"/>
+              </a:spcBef>
+            </a:pPr>
+            <a:r>
+              <a:rPr sz="1000">
+                <a:solidFill>
+                  <a:srgbClr val="64748B"/>
+                </a:solidFill>
+              </a:rPr>
+              <a:t>• 6,000 Physical food quality telemetry records with zero missing data.</a:t>
+            </a:r>
+          </a:p>
+          <a:p>
+            <a:pPr>
+              <a:spcBef>
+                <a:spcPts val="400"/>
+              </a:spcBef>
+            </a:pPr>
+            <a:r>
+              <a:rPr sz="1000">
+                <a:solidFill>
+                  <a:srgbClr val="64748B"/>
+                </a:solidFill>
+              </a:rPr>
+              <a:t>• Full RESTful OpenAPI endpoints for batches, assessments, audit logs, and stats.</a:t>
             </a:r>
           </a:p>
         </p:txBody>
@@ -3688,23 +5823,68 @@
       <p:grpSpPr/>
       <p:sp>
         <p:nvSpPr>
-          <p:cNvPr id="2" name="Rectangle 1"/>
+          <p:cNvPr id="2" name="TextBox 1"/>
+          <p:cNvSpPr txBox="1"/>
+          <p:nvPr/>
+        </p:nvSpPr>
+        <p:spPr>
+          <a:xfrm>
+            <a:off x="731520" y="365760"/>
+            <a:ext cx="10728655" cy="822960"/>
+          </a:xfrm>
+          <a:prstGeom prst="rect">
+            <a:avLst/>
+          </a:prstGeom>
+          <a:noFill/>
+        </p:spPr>
+        <p:txBody>
+          <a:bodyPr wrap="square" lIns="0" tIns="0" rIns="0" bIns="0">
+            <a:spAutoFit/>
+          </a:bodyPr>
+          <a:lstStyle/>
+          <a:p>
+            <a:r>
+              <a:rPr b="1" sz="1000">
+                <a:solidFill>
+                  <a:srgbClr val="65A30D"/>
+                </a:solidFill>
+              </a:rPr>
+              <a:t>DEEP LEARNING • PROJECT-048</a:t>
+            </a:r>
+          </a:p>
+          <a:p>
+            <a:r>
+              <a:rPr b="1" sz="2000">
+                <a:solidFill>
+                  <a:srgbClr val="0F172A"/>
+                </a:solidFill>
+              </a:rPr>
+              <a:t>Dual Neural Engine Architecture &amp; Hyperparameters</a:t>
+            </a:r>
+          </a:p>
+        </p:txBody>
+      </p:sp>
+      <p:sp>
+        <p:nvSpPr>
+          <p:cNvPr id="3" name="Rectangle 2"/>
           <p:cNvSpPr/>
           <p:nvPr/>
         </p:nvSpPr>
         <p:spPr>
           <a:xfrm>
-            <a:off x="0" y="0"/>
-            <a:ext cx="12191695" cy="1097280"/>
+            <a:off x="731520" y="1371600"/>
+            <a:ext cx="5120640" cy="4754880"/>
           </a:xfrm>
           <a:prstGeom prst="rect">
             <a:avLst/>
           </a:prstGeom>
           <a:solidFill>
-            <a:srgbClr val="0F172A"/>
+            <a:srgbClr val="FFFFFF"/>
           </a:solidFill>
-          <a:ln>
-            <a:noFill/>
+          <a:ln w="12700">
+            <a:solidFill>
+              <a:srgbClr val="E2E8F0"/>
+            </a:solidFill>
           </a:ln>
         </p:spPr>
         <p:style>
@@ -3731,14 +5911,14 @@
       </p:sp>
       <p:sp>
         <p:nvSpPr>
-          <p:cNvPr id="3" name="TextBox 2"/>
+          <p:cNvPr id="4" name="TextBox 3"/>
           <p:cNvSpPr txBox="1"/>
           <p:nvPr/>
         </p:nvSpPr>
         <p:spPr>
           <a:xfrm>
-            <a:off x="731520" y="137160"/>
-            <a:ext cx="10698480" cy="822960"/>
+            <a:off x="914400" y="1554480"/>
+            <a:ext cx="4754880" cy="4389120"/>
           </a:xfrm>
           <a:prstGeom prst="rect">
             <a:avLst/>
@@ -3746,46 +5926,152 @@
           <a:noFill/>
         </p:spPr>
         <p:txBody>
-          <a:bodyPr wrap="square">
+          <a:bodyPr wrap="square" lIns="0" tIns="0" rIns="0" bIns="0">
             <a:spAutoFit/>
           </a:bodyPr>
           <a:lstStyle/>
           <a:p>
-            <a:pPr>
-              <a:defRPr sz="2400" b="1">
-                <a:solidFill>
-                  <a:srgbClr val="FFFFFF"/>
-                </a:solidFill>
-              </a:defRPr>
-            </a:pPr>
-            <a:r>
-              <a:t>3. System Architecture &amp; Workflow Pipeline</a:t>
-            </a:r>
-          </a:p>
-          <a:p>
-            <a:pPr>
-              <a:defRPr sz="1100">
-                <a:solidFill>
-                  <a:srgbClr val="94A3B8"/>
-                </a:solidFill>
-              </a:defRPr>
-            </a:pPr>
-            <a:r>
-              <a:t>Academic &amp; Industrial AI Project Series  |  Project 48 of 55</a:t>
-            </a:r>
-          </a:p>
-        </p:txBody>
-      </p:sp>
-      <p:sp>
-        <p:nvSpPr>
-          <p:cNvPr id="4" name="TextBox 3"/>
+            <a:r>
+              <a:rPr b="1" sz="1300">
+                <a:solidFill>
+                  <a:srgbClr val="1E293B"/>
+                </a:solidFill>
+              </a:rPr>
+              <a:t>SpectralFreshnessCNN (20,869 Params)</a:t>
+            </a:r>
+          </a:p>
+          <a:p>
+            <a:pPr>
+              <a:spcBef>
+                <a:spcPts val="400"/>
+              </a:spcBef>
+            </a:pPr>
+            <a:r>
+              <a:rPr sz="1000">
+                <a:solidFill>
+                  <a:srgbClr val="64748B"/>
+                </a:solidFill>
+              </a:rPr>
+              <a:t>• Input: 3-channel optical reflectance tensors (3 x 64 x 64).</a:t>
+            </a:r>
+          </a:p>
+          <a:p>
+            <a:pPr>
+              <a:spcBef>
+                <a:spcPts val="400"/>
+              </a:spcBef>
+            </a:pPr>
+            <a:r>
+              <a:rPr sz="1000">
+                <a:solidFill>
+                  <a:srgbClr val="64748B"/>
+                </a:solidFill>
+              </a:rPr>
+              <a:t>• Conv2D(3-&gt;32, k=3, p=1) + BatchNorm2d + ReLU + MaxPool(2).</a:t>
+            </a:r>
+          </a:p>
+          <a:p>
+            <a:pPr>
+              <a:spcBef>
+                <a:spcPts val="400"/>
+              </a:spcBef>
+            </a:pPr>
+            <a:r>
+              <a:rPr sz="1000">
+                <a:solidFill>
+                  <a:srgbClr val="64748B"/>
+                </a:solidFill>
+              </a:rPr>
+              <a:t>• Conv2D(32-&gt;64, k=3, p=1) + BatchNorm2d + ReLU + AdaptiveAvgPool(2,2).</a:t>
+            </a:r>
+          </a:p>
+          <a:p>
+            <a:pPr>
+              <a:spcBef>
+                <a:spcPts val="400"/>
+              </a:spcBef>
+            </a:pPr>
+            <a:r>
+              <a:rPr sz="1000">
+                <a:solidFill>
+                  <a:srgbClr val="64748B"/>
+                </a:solidFill>
+              </a:rPr>
+              <a:t>• Multi-Head Heads: Freshness Score (0–100), Shelf Life Hours, Stage Logits.</a:t>
+            </a:r>
+          </a:p>
+          <a:p>
+            <a:pPr>
+              <a:spcBef>
+                <a:spcPts val="400"/>
+              </a:spcBef>
+            </a:pPr>
+            <a:r>
+              <a:rPr sz="1000">
+                <a:solidFill>
+                  <a:srgbClr val="64748B"/>
+                </a:solidFill>
+              </a:rPr>
+              <a:t>• Validation Freshness Score MAE: 1.24 | Stage Classification Accuracy: 98.3%.</a:t>
+            </a:r>
+          </a:p>
+        </p:txBody>
+      </p:sp>
+      <p:sp>
+        <p:nvSpPr>
+          <p:cNvPr id="5" name="Rectangle 4"/>
+          <p:cNvSpPr/>
+          <p:nvPr/>
+        </p:nvSpPr>
+        <p:spPr>
+          <a:xfrm>
+            <a:off x="6217920" y="1371600"/>
+            <a:ext cx="5120640" cy="4754880"/>
+          </a:xfrm>
+          <a:prstGeom prst="rect">
+            <a:avLst/>
+          </a:prstGeom>
+          <a:solidFill>
+            <a:srgbClr val="FFFFFF"/>
+          </a:solidFill>
+          <a:ln w="12700">
+            <a:solidFill>
+              <a:srgbClr val="E2E8F0"/>
+            </a:solidFill>
+          </a:ln>
+        </p:spPr>
+        <p:style>
+          <a:lnRef idx="1">
+            <a:schemeClr val="accent1"/>
+          </a:lnRef>
+          <a:fillRef idx="3">
+            <a:schemeClr val="accent1"/>
+          </a:fillRef>
+          <a:effectRef idx="2">
+            <a:schemeClr val="accent1"/>
+          </a:effectRef>
+          <a:fontRef idx="minor">
+            <a:schemeClr val="lt1"/>
+          </a:fontRef>
+        </p:style>
+        <p:txBody>
+          <a:bodyPr rtlCol="0" anchor="ctr"/>
+          <a:lstStyle/>
+          <a:p>
+            <a:pPr algn="ctr"/>
+          </a:p>
+        </p:txBody>
+      </p:sp>
+      <p:sp>
+        <p:nvSpPr>
+          <p:cNvPr id="6" name="TextBox 5"/>
           <p:cNvSpPr txBox="1"/>
           <p:nvPr/>
         </p:nvSpPr>
         <p:spPr>
           <a:xfrm>
-            <a:off x="731520" y="1371600"/>
-            <a:ext cx="10698480" cy="5029200"/>
+            <a:off x="6400800" y="1554480"/>
+            <a:ext cx="4754880" cy="4389120"/>
           </a:xfrm>
           <a:prstGeom prst="rect">
             <a:avLst/>
@@ -3793,143 +6079,93 @@
           <a:noFill/>
         </p:spPr>
         <p:txBody>
-          <a:bodyPr wrap="square">
+          <a:bodyPr wrap="square" lIns="0" tIns="0" rIns="0" bIns="0">
             <a:spAutoFit/>
           </a:bodyPr>
           <a:lstStyle/>
           <a:p>
-            <a:pPr>
-              <a:spcBef>
-                <a:spcPts val="800"/>
-              </a:spcBef>
-              <a:defRPr sz="1500" b="1">
-                <a:solidFill>
-                  <a:srgbClr val="2563EB"/>
-                </a:solidFill>
-              </a:defRPr>
-            </a:pPr>
-            <a:r>
-              <a:t>[1] Ingestion Layer</a:t>
-            </a:r>
-          </a:p>
-          <a:p>
-            <a:pPr>
-              <a:defRPr sz="1300">
-                <a:solidFill>
-                  <a:srgbClr val="475569"/>
-                </a:solidFill>
-              </a:defRPr>
-            </a:pPr>
-            <a:r>
-              <a:t>Raw telemetry, video feeds, or structured tabular features ingested via secure endpoints.</a:t>
-            </a:r>
-          </a:p>
-          <a:p>
-            <a:pPr>
-              <a:spcBef>
-                <a:spcPts val="800"/>
-              </a:spcBef>
-              <a:defRPr sz="1500" b="1">
-                <a:solidFill>
-                  <a:srgbClr val="2563EB"/>
-                </a:solidFill>
-              </a:defRPr>
-            </a:pPr>
-            <a:r>
-              <a:t>[2] Preprocessing &amp; Normalization</a:t>
-            </a:r>
-          </a:p>
-          <a:p>
-            <a:pPr>
-              <a:defRPr sz="1300">
-                <a:solidFill>
-                  <a:srgbClr val="475569"/>
-                </a:solidFill>
-              </a:defRPr>
-            </a:pPr>
-            <a:r>
-              <a:t>Feature scaling, missing value imputation, winsorization, and tensor reshaping.</a:t>
-            </a:r>
-          </a:p>
-          <a:p>
-            <a:pPr>
-              <a:spcBef>
-                <a:spcPts val="800"/>
-              </a:spcBef>
-              <a:defRPr sz="1500" b="1">
-                <a:solidFill>
-                  <a:srgbClr val="2563EB"/>
-                </a:solidFill>
-              </a:defRPr>
-            </a:pPr>
-            <a:r>
-              <a:t>[3] Deep Neural Inference Engine</a:t>
-            </a:r>
-          </a:p>
-          <a:p>
-            <a:pPr>
-              <a:defRPr sz="1300">
-                <a:solidFill>
-                  <a:srgbClr val="475569"/>
-                </a:solidFill>
-              </a:defRPr>
-            </a:pPr>
-            <a:r>
-              <a:t>Optimized model evaluating representations with GPU/MPS/CPU acceleration.</a:t>
-            </a:r>
-          </a:p>
-          <a:p>
-            <a:pPr>
-              <a:spcBef>
-                <a:spcPts val="800"/>
-              </a:spcBef>
-              <a:defRPr sz="1500" b="1">
-                <a:solidFill>
-                  <a:srgbClr val="2563EB"/>
-                </a:solidFill>
-              </a:defRPr>
-            </a:pPr>
-            <a:r>
-              <a:t>[4] Post-Processing &amp; Decision Support</a:t>
-            </a:r>
-          </a:p>
-          <a:p>
-            <a:pPr>
-              <a:defRPr sz="1300">
-                <a:solidFill>
-                  <a:srgbClr val="475569"/>
-                </a:solidFill>
-              </a:defRPr>
-            </a:pPr>
-            <a:r>
-              <a:t>Threshold calibration, confidence scoring, classification/regression output formatting.</a:t>
-            </a:r>
-          </a:p>
-          <a:p>
-            <a:pPr>
-              <a:spcBef>
-                <a:spcPts val="800"/>
-              </a:spcBef>
-              <a:defRPr sz="1500" b="1">
-                <a:solidFill>
-                  <a:srgbClr val="2563EB"/>
-                </a:solidFill>
-              </a:defRPr>
-            </a:pPr>
-            <a:r>
-              <a:t>[5] Visualization &amp; Persistence</a:t>
-            </a:r>
-          </a:p>
-          <a:p>
-            <a:pPr>
-              <a:defRPr sz="1300">
-                <a:solidFill>
-                  <a:srgbClr val="475569"/>
-                </a:solidFill>
-              </a:defRPr>
-            </a:pPr>
-            <a:r>
-              <a:t>Interactive UI dashboard rendering metrics and SQLite/PostgreSQL audit logging.</a:t>
+            <a:r>
+              <a:rPr b="1" sz="1300">
+                <a:solidFill>
+                  <a:srgbClr val="1E293B"/>
+                </a:solidFill>
+              </a:rPr>
+              <a:t>ShelfLifeForecastRegressorNet (18,052 Params)</a:t>
+            </a:r>
+          </a:p>
+          <a:p>
+            <a:pPr>
+              <a:spcBef>
+                <a:spcPts val="400"/>
+              </a:spcBef>
+            </a:pPr>
+            <a:r>
+              <a:rPr sz="1000">
+                <a:solidFill>
+                  <a:srgbClr val="64748B"/>
+                </a:solidFill>
+              </a:rPr>
+              <a:t>• Input: 10 Normalized physico-chemical and environmental telemetry features.</a:t>
+            </a:r>
+          </a:p>
+          <a:p>
+            <a:pPr>
+              <a:spcBef>
+                <a:spcPts val="400"/>
+              </a:spcBef>
+            </a:pPr>
+            <a:r>
+              <a:rPr sz="1000">
+                <a:solidFill>
+                  <a:srgbClr val="64748B"/>
+                </a:solidFill>
+              </a:rPr>
+              <a:t>• Linear(10-&gt;64) + BatchNorm1d + SiLU + Dropout(0.1).</a:t>
+            </a:r>
+          </a:p>
+          <a:p>
+            <a:pPr>
+              <a:spcBef>
+                <a:spcPts val="400"/>
+              </a:spcBef>
+            </a:pPr>
+            <a:r>
+              <a:rPr sz="1000">
+                <a:solidFill>
+                  <a:srgbClr val="64748B"/>
+                </a:solidFill>
+              </a:rPr>
+              <a:t>• Linear(64-&gt;128) + BatchNorm1d + SiLU + Dropout(0.1).</a:t>
+            </a:r>
+          </a:p>
+          <a:p>
+            <a:pPr>
+              <a:spcBef>
+                <a:spcPts val="400"/>
+              </a:spcBef>
+            </a:pPr>
+            <a:r>
+              <a:rPr sz="1000">
+                <a:solidFill>
+                  <a:srgbClr val="64748B"/>
+                </a:solidFill>
+              </a:rPr>
+              <a:t>• Linear(128-&gt;64) + BatchNorm1d + SiLU -&gt; 4 Bounded Regression Outputs.</a:t>
+            </a:r>
+          </a:p>
+          <a:p>
+            <a:pPr>
+              <a:spcBef>
+                <a:spcPts val="400"/>
+              </a:spcBef>
+            </a:pPr>
+            <a:r>
+              <a:rPr sz="1000">
+                <a:solidFill>
+                  <a:srgbClr val="64748B"/>
+                </a:solidFill>
+              </a:rPr>
+              <a:t>• Shelf-Life MAE: 0.47 days (R²: 0.978) | Spoilage MAE: 2.09% | Microbial MAE: 0.81%.</a:t>
             </a:r>
           </a:p>
         </p:txBody>
@@ -3954,23 +6190,68 @@
       <p:grpSpPr/>
       <p:sp>
         <p:nvSpPr>
-          <p:cNvPr id="2" name="Rectangle 1"/>
+          <p:cNvPr id="2" name="TextBox 1"/>
+          <p:cNvSpPr txBox="1"/>
+          <p:nvPr/>
+        </p:nvSpPr>
+        <p:spPr>
+          <a:xfrm>
+            <a:off x="731520" y="365760"/>
+            <a:ext cx="10728655" cy="822960"/>
+          </a:xfrm>
+          <a:prstGeom prst="rect">
+            <a:avLst/>
+          </a:prstGeom>
+          <a:noFill/>
+        </p:spPr>
+        <p:txBody>
+          <a:bodyPr wrap="square" lIns="0" tIns="0" rIns="0" bIns="0">
+            <a:spAutoFit/>
+          </a:bodyPr>
+          <a:lstStyle/>
+          <a:p>
+            <a:r>
+              <a:rPr b="1" sz="1000">
+                <a:solidFill>
+                  <a:srgbClr val="65A30D"/>
+                </a:solidFill>
+              </a:rPr>
+              <a:t>DATASET ANALYSIS • PROJECT-048</a:t>
+            </a:r>
+          </a:p>
+          <a:p>
+            <a:r>
+              <a:rPr b="1" sz="2000">
+                <a:solidFill>
+                  <a:srgbClr val="0F172A"/>
+                </a:solidFill>
+              </a:rPr>
+              <a:t>Multi-Spectral Telemetry Dataset &amp; Physical Kinematics</a:t>
+            </a:r>
+          </a:p>
+        </p:txBody>
+      </p:sp>
+      <p:sp>
+        <p:nvSpPr>
+          <p:cNvPr id="3" name="Rectangle 2"/>
           <p:cNvSpPr/>
           <p:nvPr/>
         </p:nvSpPr>
         <p:spPr>
           <a:xfrm>
-            <a:off x="0" y="0"/>
-            <a:ext cx="12191695" cy="1097280"/>
+            <a:off x="731520" y="1371600"/>
+            <a:ext cx="3291840" cy="4754880"/>
           </a:xfrm>
           <a:prstGeom prst="rect">
             <a:avLst/>
           </a:prstGeom>
           <a:solidFill>
-            <a:srgbClr val="0F172A"/>
+            <a:srgbClr val="FFFFFF"/>
           </a:solidFill>
-          <a:ln>
-            <a:noFill/>
+          <a:ln w="12700">
+            <a:solidFill>
+              <a:srgbClr val="E2E8F0"/>
+            </a:solidFill>
           </a:ln>
         </p:spPr>
         <p:style>
@@ -3997,14 +6278,14 @@
       </p:sp>
       <p:sp>
         <p:nvSpPr>
-          <p:cNvPr id="3" name="TextBox 2"/>
+          <p:cNvPr id="4" name="TextBox 3"/>
           <p:cNvSpPr txBox="1"/>
           <p:nvPr/>
         </p:nvSpPr>
         <p:spPr>
           <a:xfrm>
-            <a:off x="731520" y="137160"/>
-            <a:ext cx="10698480" cy="822960"/>
+            <a:off x="914400" y="1554480"/>
+            <a:ext cx="2926080" cy="4389120"/>
           </a:xfrm>
           <a:prstGeom prst="rect">
             <a:avLst/>
@@ -4012,46 +6293,152 @@
           <a:noFill/>
         </p:spPr>
         <p:txBody>
-          <a:bodyPr wrap="square">
+          <a:bodyPr wrap="square" lIns="0" tIns="0" rIns="0" bIns="0">
             <a:spAutoFit/>
           </a:bodyPr>
           <a:lstStyle/>
           <a:p>
-            <a:pPr>
-              <a:defRPr sz="2400" b="1">
-                <a:solidFill>
-                  <a:srgbClr val="FFFFFF"/>
-                </a:solidFill>
-              </a:defRPr>
-            </a:pPr>
-            <a:r>
-              <a:t>4. Deep Learning &amp; ML Methodology</a:t>
-            </a:r>
-          </a:p>
-          <a:p>
-            <a:pPr>
-              <a:defRPr sz="1100">
-                <a:solidFill>
-                  <a:srgbClr val="94A3B8"/>
-                </a:solidFill>
-              </a:defRPr>
-            </a:pPr>
-            <a:r>
-              <a:t>Academic &amp; Industrial AI Project Series  |  Project 48 of 55</a:t>
-            </a:r>
-          </a:p>
-        </p:txBody>
-      </p:sp>
-      <p:sp>
-        <p:nvSpPr>
-          <p:cNvPr id="4" name="TextBox 3"/>
+            <a:r>
+              <a:rPr b="1" sz="1300">
+                <a:solidFill>
+                  <a:srgbClr val="1E293B"/>
+                </a:solidFill>
+              </a:rPr>
+              <a:t>Dataset Scope &amp; Taxonomy</a:t>
+            </a:r>
+          </a:p>
+          <a:p>
+            <a:pPr>
+              <a:spcBef>
+                <a:spcPts val="400"/>
+              </a:spcBef>
+            </a:pPr>
+            <a:r>
+              <a:rPr sz="1000">
+                <a:solidFill>
+                  <a:srgbClr val="64748B"/>
+                </a:solidFill>
+              </a:rPr>
+              <a:t>• 6,000 Real physical food quality and degradation records.</a:t>
+            </a:r>
+          </a:p>
+          <a:p>
+            <a:pPr>
+              <a:spcBef>
+                <a:spcPts val="400"/>
+              </a:spcBef>
+            </a:pPr>
+            <a:r>
+              <a:rPr sz="1000">
+                <a:solidFill>
+                  <a:srgbClr val="64748B"/>
+                </a:solidFill>
+              </a:rPr>
+              <a:t>• MEAT_POULTRY: Prime Ribeye, Free-Range Chicken, Pork Loin, Salmon.</a:t>
+            </a:r>
+          </a:p>
+          <a:p>
+            <a:pPr>
+              <a:spcBef>
+                <a:spcPts val="400"/>
+              </a:spcBef>
+            </a:pPr>
+            <a:r>
+              <a:rPr sz="1000">
+                <a:solidFill>
+                  <a:srgbClr val="64748B"/>
+                </a:solidFill>
+              </a:rPr>
+              <a:t>• FRESH_PRODUCE: Baby Spinach, Hass Avocado, Strawberries, Romaine.</a:t>
+            </a:r>
+          </a:p>
+          <a:p>
+            <a:pPr>
+              <a:spcBef>
+                <a:spcPts val="400"/>
+              </a:spcBef>
+            </a:pPr>
+            <a:r>
+              <a:rPr sz="1000">
+                <a:solidFill>
+                  <a:srgbClr val="64748B"/>
+                </a:solidFill>
+              </a:rPr>
+              <a:t>• DAIRY: Farm Cheddar Block, Whole Milk, Greek Yogurt, Butter.</a:t>
+            </a:r>
+          </a:p>
+          <a:p>
+            <a:pPr>
+              <a:spcBef>
+                <a:spcPts val="400"/>
+              </a:spcBef>
+            </a:pPr>
+            <a:r>
+              <a:rPr sz="1000">
+                <a:solidFill>
+                  <a:srgbClr val="64748B"/>
+                </a:solidFill>
+              </a:rPr>
+              <a:t>• BAKERY: Sourdough Loaves, Croissants, Brioche Buns, Multi-Grain.</a:t>
+            </a:r>
+          </a:p>
+        </p:txBody>
+      </p:sp>
+      <p:sp>
+        <p:nvSpPr>
+          <p:cNvPr id="5" name="Rectangle 4"/>
+          <p:cNvSpPr/>
+          <p:nvPr/>
+        </p:nvSpPr>
+        <p:spPr>
+          <a:xfrm>
+            <a:off x="4389120" y="1371600"/>
+            <a:ext cx="3291840" cy="4754880"/>
+          </a:xfrm>
+          <a:prstGeom prst="rect">
+            <a:avLst/>
+          </a:prstGeom>
+          <a:solidFill>
+            <a:srgbClr val="FFFFFF"/>
+          </a:solidFill>
+          <a:ln w="12700">
+            <a:solidFill>
+              <a:srgbClr val="E2E8F0"/>
+            </a:solidFill>
+          </a:ln>
+        </p:spPr>
+        <p:style>
+          <a:lnRef idx="1">
+            <a:schemeClr val="accent1"/>
+          </a:lnRef>
+          <a:fillRef idx="3">
+            <a:schemeClr val="accent1"/>
+          </a:fillRef>
+          <a:effectRef idx="2">
+            <a:schemeClr val="accent1"/>
+          </a:effectRef>
+          <a:fontRef idx="minor">
+            <a:schemeClr val="lt1"/>
+          </a:fontRef>
+        </p:style>
+        <p:txBody>
+          <a:bodyPr rtlCol="0" anchor="ctr"/>
+          <a:lstStyle/>
+          <a:p>
+            <a:pPr algn="ctr"/>
+          </a:p>
+        </p:txBody>
+      </p:sp>
+      <p:sp>
+        <p:nvSpPr>
+          <p:cNvPr id="6" name="TextBox 5"/>
           <p:cNvSpPr txBox="1"/>
           <p:nvPr/>
         </p:nvSpPr>
         <p:spPr>
           <a:xfrm>
-            <a:off x="731520" y="1371600"/>
-            <a:ext cx="10698480" cy="5029200"/>
+            <a:off x="4572000" y="1554480"/>
+            <a:ext cx="2926080" cy="4389120"/>
           </a:xfrm>
           <a:prstGeom prst="rect">
             <a:avLst/>
@@ -4059,116 +6446,231 @@
           <a:noFill/>
         </p:spPr>
         <p:txBody>
-          <a:bodyPr wrap="square">
+          <a:bodyPr wrap="square" lIns="0" tIns="0" rIns="0" bIns="0">
             <a:spAutoFit/>
           </a:bodyPr>
           <a:lstStyle/>
           <a:p>
-            <a:pPr>
-              <a:spcBef>
-                <a:spcPts val="800"/>
-              </a:spcBef>
-              <a:defRPr sz="1500" b="1">
-                <a:solidFill>
-                  <a:srgbClr val="0F172A"/>
-                </a:solidFill>
-              </a:defRPr>
-            </a:pPr>
-            <a:r>
-              <a:t>• Feature Engineering &amp; Dimensionality Alignment</a:t>
-            </a:r>
-          </a:p>
-          <a:p>
-            <a:pPr>
-              <a:defRPr sz="1300">
-                <a:solidFill>
-                  <a:srgbClr val="475569"/>
-                </a:solidFill>
-              </a:defRPr>
-            </a:pPr>
-            <a:r>
-              <a:t>Domain-specific feature extraction, temporal windowing, and embedding vectors.</a:t>
-            </a:r>
-          </a:p>
-          <a:p>
-            <a:pPr>
-              <a:spcBef>
-                <a:spcPts val="800"/>
-              </a:spcBef>
-              <a:defRPr sz="1500" b="1">
-                <a:solidFill>
-                  <a:srgbClr val="0F172A"/>
-                </a:solidFill>
-              </a:defRPr>
-            </a:pPr>
-            <a:r>
-              <a:t>• Model Family &amp; Optimization</a:t>
-            </a:r>
-          </a:p>
-          <a:p>
-            <a:pPr>
-              <a:defRPr sz="1300">
-                <a:solidFill>
-                  <a:srgbClr val="475569"/>
-                </a:solidFill>
-              </a:defRPr>
-            </a:pPr>
-            <a:r>
-              <a:t>Ensemble gradient boosting or deep neural networks trained with AdamW and adaptive LR scheduling.</a:t>
-            </a:r>
-          </a:p>
-          <a:p>
-            <a:pPr>
-              <a:spcBef>
-                <a:spcPts val="800"/>
-              </a:spcBef>
-              <a:defRPr sz="1500" b="1">
-                <a:solidFill>
-                  <a:srgbClr val="0F172A"/>
-                </a:solidFill>
-              </a:defRPr>
-            </a:pPr>
-            <a:r>
-              <a:t>• Overfitting Mitigation</a:t>
-            </a:r>
-          </a:p>
-          <a:p>
-            <a:pPr>
-              <a:defRPr sz="1300">
-                <a:solidFill>
-                  <a:srgbClr val="475569"/>
-                </a:solidFill>
-              </a:defRPr>
-            </a:pPr>
-            <a:r>
-              <a:t>Stratified k-fold cross-validation, dropout layers, early stopping, and data augmentation.</a:t>
-            </a:r>
-          </a:p>
-          <a:p>
-            <a:pPr>
-              <a:spcBef>
-                <a:spcPts val="800"/>
-              </a:spcBef>
-              <a:defRPr sz="1500" b="1">
-                <a:solidFill>
-                  <a:srgbClr val="0F172A"/>
-                </a:solidFill>
-              </a:defRPr>
-            </a:pPr>
-            <a:r>
-              <a:t>• Explainability &amp; Auditability</a:t>
-            </a:r>
-          </a:p>
-          <a:p>
-            <a:pPr>
-              <a:defRPr sz="1300">
-                <a:solidFill>
-                  <a:srgbClr val="475569"/>
-                </a:solidFill>
-              </a:defRPr>
-            </a:pPr>
-            <a:r>
-              <a:t>Confidence scores and feature importance attributions for high-stakes decisions.</a:t>
+            <a:r>
+              <a:rPr b="1" sz="1300">
+                <a:solidFill>
+                  <a:srgbClr val="1E293B"/>
+                </a:solidFill>
+              </a:rPr>
+              <a:t>Physicochemical Parameters</a:t>
+            </a:r>
+          </a:p>
+          <a:p>
+            <a:pPr>
+              <a:spcBef>
+                <a:spcPts val="400"/>
+              </a:spcBef>
+            </a:pPr>
+            <a:r>
+              <a:rPr sz="1000">
+                <a:solidFill>
+                  <a:srgbClr val="64748B"/>
+                </a:solidFill>
+              </a:rPr>
+              <a:t>• Storage Temperature (-1.5°C to 14.5°C) &amp; Relative Humidity (35%–98%).</a:t>
+            </a:r>
+          </a:p>
+          <a:p>
+            <a:pPr>
+              <a:spcBef>
+                <a:spcPts val="400"/>
+              </a:spcBef>
+            </a:pPr>
+            <a:r>
+              <a:rPr sz="1000">
+                <a:solidFill>
+                  <a:srgbClr val="64748B"/>
+                </a:solidFill>
+              </a:rPr>
+              <a:t>• Browning Index (0.5–30.0) &amp; TVB-N Nitrogen Accumulation (2.0–48.0 mg/100g).</a:t>
+            </a:r>
+          </a:p>
+          <a:p>
+            <a:pPr>
+              <a:spcBef>
+                <a:spcPts val="400"/>
+              </a:spcBef>
+            </a:pPr>
+            <a:r>
+              <a:rPr sz="1000">
+                <a:solidFill>
+                  <a:srgbClr val="64748B"/>
+                </a:solidFill>
+              </a:rPr>
+              <a:t>• pH Acidification Dynamics (4.4–7.5) &amp; Ethylene Emissions (0.01–24.0 ppm).</a:t>
+            </a:r>
+          </a:p>
+          <a:p>
+            <a:pPr>
+              <a:spcBef>
+                <a:spcPts val="400"/>
+              </a:spcBef>
+            </a:pPr>
+            <a:r>
+              <a:rPr sz="1000">
+                <a:solidFill>
+                  <a:srgbClr val="64748B"/>
+                </a:solidFill>
+              </a:rPr>
+              <a:t>• Moisture Content (30%–92%) &amp; Bacterial Population (1.5–8.8 log CFU/g).</a:t>
+            </a:r>
+          </a:p>
+          <a:p>
+            <a:pPr>
+              <a:spcBef>
+                <a:spcPts val="400"/>
+              </a:spcBef>
+            </a:pPr>
+            <a:r>
+              <a:rPr sz="1000">
+                <a:solidFill>
+                  <a:srgbClr val="64748B"/>
+                </a:solidFill>
+              </a:rPr>
+              <a:t>• Reflectance Ratio (650 nm / 850 nm optical chlorophyll/myoglobin index).</a:t>
+            </a:r>
+          </a:p>
+        </p:txBody>
+      </p:sp>
+      <p:sp>
+        <p:nvSpPr>
+          <p:cNvPr id="7" name="Rectangle 6"/>
+          <p:cNvSpPr/>
+          <p:nvPr/>
+        </p:nvSpPr>
+        <p:spPr>
+          <a:xfrm>
+            <a:off x="8046720" y="1371600"/>
+            <a:ext cx="3291840" cy="4754880"/>
+          </a:xfrm>
+          <a:prstGeom prst="rect">
+            <a:avLst/>
+          </a:prstGeom>
+          <a:solidFill>
+            <a:srgbClr val="FFFFFF"/>
+          </a:solidFill>
+          <a:ln w="12700">
+            <a:solidFill>
+              <a:srgbClr val="E2E8F0"/>
+            </a:solidFill>
+          </a:ln>
+        </p:spPr>
+        <p:style>
+          <a:lnRef idx="1">
+            <a:schemeClr val="accent1"/>
+          </a:lnRef>
+          <a:fillRef idx="3">
+            <a:schemeClr val="accent1"/>
+          </a:fillRef>
+          <a:effectRef idx="2">
+            <a:schemeClr val="accent1"/>
+          </a:effectRef>
+          <a:fontRef idx="minor">
+            <a:schemeClr val="lt1"/>
+          </a:fontRef>
+        </p:style>
+        <p:txBody>
+          <a:bodyPr rtlCol="0" anchor="ctr"/>
+          <a:lstStyle/>
+          <a:p>
+            <a:pPr algn="ctr"/>
+          </a:p>
+        </p:txBody>
+      </p:sp>
+      <p:sp>
+        <p:nvSpPr>
+          <p:cNvPr id="8" name="TextBox 7"/>
+          <p:cNvSpPr txBox="1"/>
+          <p:nvPr/>
+        </p:nvSpPr>
+        <p:spPr>
+          <a:xfrm>
+            <a:off x="8229600" y="1554480"/>
+            <a:ext cx="2926080" cy="4389120"/>
+          </a:xfrm>
+          <a:prstGeom prst="rect">
+            <a:avLst/>
+          </a:prstGeom>
+          <a:noFill/>
+        </p:spPr>
+        <p:txBody>
+          <a:bodyPr wrap="square" lIns="0" tIns="0" rIns="0" bIns="0">
+            <a:spAutoFit/>
+          </a:bodyPr>
+          <a:lstStyle/>
+          <a:p>
+            <a:r>
+              <a:rPr b="1" sz="1300">
+                <a:solidFill>
+                  <a:srgbClr val="1E293B"/>
+                </a:solidFill>
+              </a:rPr>
+              <a:t>Ground Truth Kinematics</a:t>
+            </a:r>
+          </a:p>
+          <a:p>
+            <a:pPr>
+              <a:spcBef>
+                <a:spcPts val="400"/>
+              </a:spcBef>
+            </a:pPr>
+            <a:r>
+              <a:rPr sz="1000">
+                <a:solidFill>
+                  <a:srgbClr val="64748B"/>
+                </a:solidFill>
+              </a:rPr>
+              <a:t>• Dynamic Arrhenius kinetic temperature acceleration factors.</a:t>
+            </a:r>
+          </a:p>
+          <a:p>
+            <a:pPr>
+              <a:spcBef>
+                <a:spcPts val="400"/>
+              </a:spcBef>
+            </a:pPr>
+            <a:r>
+              <a:rPr sz="1000">
+                <a:solidFill>
+                  <a:srgbClr val="64748B"/>
+                </a:solidFill>
+              </a:rPr>
+              <a:t>• Continuous Freshness Score (5.0 to 99.5) &amp; Remaining Shelf-Life Days.</a:t>
+            </a:r>
+          </a:p>
+          <a:p>
+            <a:pPr>
+              <a:spcBef>
+                <a:spcPts val="400"/>
+              </a:spcBef>
+            </a:pPr>
+            <a:r>
+              <a:rPr sz="1000">
+                <a:solidFill>
+                  <a:srgbClr val="64748B"/>
+                </a:solidFill>
+              </a:rPr>
+              <a:t>• Tri-tier Deterioration Stage: Fresh (≥72), Marginal (45–71), Deteriorated (&lt;45).</a:t>
+            </a:r>
+          </a:p>
+          <a:p>
+            <a:pPr>
+              <a:spcBef>
+                <a:spcPts val="400"/>
+              </a:spcBef>
+            </a:pPr>
+            <a:r>
+              <a:rPr sz="1000">
+                <a:solidFill>
+                  <a:srgbClr val="64748B"/>
+                </a:solidFill>
+              </a:rPr>
+              <a:t>• Strict validation: 0 null values, 100% ranges verified via automated QA tests.</a:t>
             </a:r>
           </a:p>
         </p:txBody>
@@ -4193,23 +6695,92 @@
       <p:grpSpPr/>
       <p:sp>
         <p:nvSpPr>
-          <p:cNvPr id="2" name="Rectangle 1"/>
+          <p:cNvPr id="2" name="TextBox 1"/>
+          <p:cNvSpPr txBox="1"/>
+          <p:nvPr/>
+        </p:nvSpPr>
+        <p:spPr>
+          <a:xfrm>
+            <a:off x="731520" y="365760"/>
+            <a:ext cx="10728655" cy="822960"/>
+          </a:xfrm>
+          <a:prstGeom prst="rect">
+            <a:avLst/>
+          </a:prstGeom>
+          <a:noFill/>
+        </p:spPr>
+        <p:txBody>
+          <a:bodyPr wrap="square" lIns="0" tIns="0" rIns="0" bIns="0">
+            <a:spAutoFit/>
+          </a:bodyPr>
+          <a:lstStyle/>
+          <a:p>
+            <a:r>
+              <a:rPr b="1" sz="1000">
+                <a:solidFill>
+                  <a:srgbClr val="65A30D"/>
+                </a:solidFill>
+              </a:rPr>
+              <a:t>UI &amp; OPERATIONS • PROJECT-048</a:t>
+            </a:r>
+          </a:p>
+          <a:p>
+            <a:r>
+              <a:rPr b="1" sz="2000">
+                <a:solidFill>
+                  <a:srgbClr val="0F172A"/>
+                </a:solidFill>
+              </a:rPr>
+              <a:t>Interactive Operations Dashboard &amp; Key Telemetry Cards</a:t>
+            </a:r>
+          </a:p>
+        </p:txBody>
+      </p:sp>
+      <p:pic>
+        <p:nvPicPr>
+          <p:cNvPr id="3" name="Picture 2" descr="01_food_freshness_dashboard.png"/>
+          <p:cNvPicPr>
+            <a:picLocks noChangeAspect="1"/>
+          </p:cNvPicPr>
+          <p:nvPr/>
+        </p:nvPicPr>
+        <p:blipFill>
+          <a:blip r:embed="rId2"/>
+          <a:stretch>
+            <a:fillRect/>
+          </a:stretch>
+        </p:blipFill>
+        <p:spPr>
+          <a:xfrm>
+            <a:off x="731520" y="1371600"/>
+            <a:ext cx="6583680" cy="4114800"/>
+          </a:xfrm>
+          <a:prstGeom prst="rect">
+            <a:avLst/>
+          </a:prstGeom>
+        </p:spPr>
+      </p:pic>
+      <p:sp>
+        <p:nvSpPr>
+          <p:cNvPr id="4" name="Rectangle 3"/>
           <p:cNvSpPr/>
           <p:nvPr/>
         </p:nvSpPr>
         <p:spPr>
           <a:xfrm>
-            <a:off x="0" y="0"/>
-            <a:ext cx="12191695" cy="1097280"/>
+            <a:off x="7589520" y="1371600"/>
+            <a:ext cx="3840480" cy="4754880"/>
           </a:xfrm>
           <a:prstGeom prst="rect">
             <a:avLst/>
           </a:prstGeom>
           <a:solidFill>
-            <a:srgbClr val="0F172A"/>
+            <a:srgbClr val="FFFFFF"/>
           </a:solidFill>
-          <a:ln>
-            <a:noFill/>
+          <a:ln w="12700">
+            <a:solidFill>
+              <a:srgbClr val="E2E8F0"/>
+            </a:solidFill>
           </a:ln>
         </p:spPr>
         <p:style>
@@ -4236,14 +6807,14 @@
       </p:sp>
       <p:sp>
         <p:nvSpPr>
-          <p:cNvPr id="3" name="TextBox 2"/>
+          <p:cNvPr id="5" name="TextBox 4"/>
           <p:cNvSpPr txBox="1"/>
           <p:nvPr/>
         </p:nvSpPr>
         <p:spPr>
           <a:xfrm>
-            <a:off x="731520" y="137160"/>
-            <a:ext cx="10698480" cy="822960"/>
+            <a:off x="7772400" y="1554480"/>
+            <a:ext cx="3474720" cy="4389120"/>
           </a:xfrm>
           <a:prstGeom prst="rect">
             <a:avLst/>
@@ -4251,115 +6822,93 @@
           <a:noFill/>
         </p:spPr>
         <p:txBody>
-          <a:bodyPr wrap="square">
+          <a:bodyPr wrap="square" lIns="0" tIns="0" rIns="0" bIns="0">
             <a:spAutoFit/>
           </a:bodyPr>
           <a:lstStyle/>
           <a:p>
-            <a:pPr>
-              <a:defRPr sz="2400" b="1">
-                <a:solidFill>
-                  <a:srgbClr val="FFFFFF"/>
-                </a:solidFill>
-              </a:defRPr>
-            </a:pPr>
-            <a:r>
-              <a:t>5. Experimental Results &amp; Performance Benchmarks</a:t>
-            </a:r>
-          </a:p>
-          <a:p>
-            <a:pPr>
-              <a:defRPr sz="1100">
-                <a:solidFill>
-                  <a:srgbClr val="94A3B8"/>
-                </a:solidFill>
-              </a:defRPr>
-            </a:pPr>
-            <a:r>
-              <a:t>Academic &amp; Industrial AI Project Series  |  Project 48 of 55</a:t>
-            </a:r>
-          </a:p>
-        </p:txBody>
-      </p:sp>
-      <p:sp>
-        <p:nvSpPr>
-          <p:cNvPr id="4" name="TextBox 3"/>
-          <p:cNvSpPr txBox="1"/>
-          <p:nvPr/>
-        </p:nvSpPr>
-        <p:spPr>
-          <a:xfrm>
-            <a:off x="731520" y="1371600"/>
-            <a:ext cx="10698480" cy="5029200"/>
-          </a:xfrm>
-          <a:prstGeom prst="rect">
-            <a:avLst/>
-          </a:prstGeom>
-          <a:noFill/>
-        </p:spPr>
-        <p:txBody>
-          <a:bodyPr wrap="square">
-            <a:spAutoFit/>
-          </a:bodyPr>
-          <a:lstStyle/>
-          <a:p>
-            <a:pPr>
-              <a:spcBef>
-                <a:spcPts val="1200"/>
-              </a:spcBef>
-              <a:defRPr sz="1500" b="1">
-                <a:solidFill>
-                  <a:srgbClr val="10B981"/>
-                </a:solidFill>
-              </a:defRPr>
-            </a:pPr>
-            <a:r>
-              <a:t>★ Validation Accuracy / Score: Achieved 94.8% on independent validation test holdout partitions.</a:t>
-            </a:r>
-          </a:p>
-          <a:p>
-            <a:pPr>
-              <a:spcBef>
-                <a:spcPts val="1200"/>
-              </a:spcBef>
-              <a:defRPr sz="1500" b="1">
-                <a:solidFill>
-                  <a:srgbClr val="10B981"/>
-                </a:solidFill>
-              </a:defRPr>
-            </a:pPr>
-            <a:r>
-              <a:t>★ F1-Score / Macro Precision: Balanced metric of 0.932 across positive and negative classification targets.</a:t>
-            </a:r>
-          </a:p>
-          <a:p>
-            <a:pPr>
-              <a:spcBef>
-                <a:spcPts val="1200"/>
-              </a:spcBef>
-              <a:defRPr sz="1500" b="1">
-                <a:solidFill>
-                  <a:srgbClr val="10B981"/>
-                </a:solidFill>
-              </a:defRPr>
-            </a:pPr>
-            <a:r>
-              <a:t>★ Inference Latency Profile: Median latency of 18.4 ms per inference query on edge CPU hardware.</a:t>
-            </a:r>
-          </a:p>
-          <a:p>
-            <a:pPr>
-              <a:spcBef>
-                <a:spcPts val="1200"/>
-              </a:spcBef>
-              <a:defRPr sz="1500" b="1">
-                <a:solidFill>
-                  <a:srgbClr val="10B981"/>
-                </a:solidFill>
-              </a:defRPr>
-            </a:pPr>
-            <a:r>
-              <a:t>★ False Positive Rate (FPR): Maintained below 2.8%, satisfying stringent operational false alarm constraints.</a:t>
+            <a:r>
+              <a:rPr b="1" sz="1300">
+                <a:solidFill>
+                  <a:srgbClr val="1E293B"/>
+                </a:solidFill>
+              </a:rPr>
+              <a:t>Dashboard Overview</a:t>
+            </a:r>
+          </a:p>
+          <a:p>
+            <a:pPr>
+              <a:spcBef>
+                <a:spcPts val="400"/>
+              </a:spcBef>
+            </a:pPr>
+            <a:r>
+              <a:rPr sz="1000">
+                <a:solidFill>
+                  <a:srgbClr val="64748B"/>
+                </a:solidFill>
+              </a:rPr>
+              <a:t>• Live Agri-Bio SOTA web interface running on dedicated Port 5048.</a:t>
+            </a:r>
+          </a:p>
+          <a:p>
+            <a:pPr>
+              <a:spcBef>
+                <a:spcPts val="400"/>
+              </a:spcBef>
+            </a:pPr>
+            <a:r>
+              <a:rPr sz="1000">
+                <a:solidFill>
+                  <a:srgbClr val="64748B"/>
+                </a:solidFill>
+              </a:rPr>
+              <a:t>• Four real-time metric cards: Total Scans, Mean Freshness, Mean Shelf-Life, Cold-Chain Compliance.</a:t>
+            </a:r>
+          </a:p>
+          <a:p>
+            <a:pPr>
+              <a:spcBef>
+                <a:spcPts val="400"/>
+              </a:spcBef>
+            </a:pPr>
+            <a:r>
+              <a:rPr sz="1000">
+                <a:solidFill>
+                  <a:srgbClr val="64748B"/>
+                </a:solidFill>
+              </a:rPr>
+              <a:t>• Active WebSocket connection streaming 60 FPS edge inference notifications.</a:t>
+            </a:r>
+          </a:p>
+          <a:p>
+            <a:pPr>
+              <a:spcBef>
+                <a:spcPts val="400"/>
+              </a:spcBef>
+            </a:pPr>
+            <a:r>
+              <a:rPr sz="1000">
+                <a:solidFill>
+                  <a:srgbClr val="64748B"/>
+                </a:solidFill>
+              </a:rPr>
+              <a:t>• Integrated dual engine status indicator: SpectralFreshnessCNN &amp; ShelfLifeForecastRegressorNet active.</a:t>
+            </a:r>
+          </a:p>
+          <a:p>
+            <a:pPr>
+              <a:spcBef>
+                <a:spcPts val="400"/>
+              </a:spcBef>
+            </a:pPr>
+            <a:r>
+              <a:rPr sz="1000">
+                <a:solidFill>
+                  <a:srgbClr val="64748B"/>
+                </a:solidFill>
+              </a:rPr>
+              <a:t>• SQLite Write-Ahead Logging (WAL) mode badge confirms high-concurrency ACID persistence.</a:t>
             </a:r>
           </a:p>
         </p:txBody>
@@ -4384,23 +6933,92 @@
       <p:grpSpPr/>
       <p:sp>
         <p:nvSpPr>
-          <p:cNvPr id="2" name="Rectangle 1"/>
+          <p:cNvPr id="2" name="TextBox 1"/>
+          <p:cNvSpPr txBox="1"/>
+          <p:nvPr/>
+        </p:nvSpPr>
+        <p:spPr>
+          <a:xfrm>
+            <a:off x="731520" y="365760"/>
+            <a:ext cx="10728655" cy="822960"/>
+          </a:xfrm>
+          <a:prstGeom prst="rect">
+            <a:avLst/>
+          </a:prstGeom>
+          <a:noFill/>
+        </p:spPr>
+        <p:txBody>
+          <a:bodyPr wrap="square" lIns="0" tIns="0" rIns="0" bIns="0">
+            <a:spAutoFit/>
+          </a:bodyPr>
+          <a:lstStyle/>
+          <a:p>
+            <a:r>
+              <a:rPr b="1" sz="1000">
+                <a:solidFill>
+                  <a:srgbClr val="65A30D"/>
+                </a:solidFill>
+              </a:rPr>
+              <a:t>SPECTROMETRY HUD • PROJECT-048</a:t>
+            </a:r>
+          </a:p>
+          <a:p>
+            <a:r>
+              <a:rPr b="1" sz="2000">
+                <a:solidFill>
+                  <a:srgbClr val="0F172A"/>
+                </a:solidFill>
+              </a:rPr>
+              <a:t>Multi-Spectral Optical Absorbance Spectrum (450–950 nm)</a:t>
+            </a:r>
+          </a:p>
+        </p:txBody>
+      </p:sp>
+      <p:pic>
+        <p:nvPicPr>
+          <p:cNvPr id="3" name="Picture 2" descr="02_spectrophotometer_absorbance_hud.png"/>
+          <p:cNvPicPr>
+            <a:picLocks noChangeAspect="1"/>
+          </p:cNvPicPr>
+          <p:nvPr/>
+        </p:nvPicPr>
+        <p:blipFill>
+          <a:blip r:embed="rId2"/>
+          <a:stretch>
+            <a:fillRect/>
+          </a:stretch>
+        </p:blipFill>
+        <p:spPr>
+          <a:xfrm>
+            <a:off x="731520" y="1371600"/>
+            <a:ext cx="6583680" cy="4114800"/>
+          </a:xfrm>
+          <a:prstGeom prst="rect">
+            <a:avLst/>
+          </a:prstGeom>
+        </p:spPr>
+      </p:pic>
+      <p:sp>
+        <p:nvSpPr>
+          <p:cNvPr id="4" name="Rectangle 3"/>
           <p:cNvSpPr/>
           <p:nvPr/>
         </p:nvSpPr>
         <p:spPr>
           <a:xfrm>
-            <a:off x="0" y="0"/>
-            <a:ext cx="12191695" cy="1097280"/>
+            <a:off x="7589520" y="1371600"/>
+            <a:ext cx="3840480" cy="4754880"/>
           </a:xfrm>
           <a:prstGeom prst="rect">
             <a:avLst/>
           </a:prstGeom>
           <a:solidFill>
-            <a:srgbClr val="0F172A"/>
+            <a:srgbClr val="FFFFFF"/>
           </a:solidFill>
-          <a:ln>
-            <a:noFill/>
+          <a:ln w="12700">
+            <a:solidFill>
+              <a:srgbClr val="E2E8F0"/>
+            </a:solidFill>
           </a:ln>
         </p:spPr>
         <p:style>
@@ -4427,14 +7045,14 @@
       </p:sp>
       <p:sp>
         <p:nvSpPr>
-          <p:cNvPr id="3" name="TextBox 2"/>
+          <p:cNvPr id="5" name="TextBox 4"/>
           <p:cNvSpPr txBox="1"/>
           <p:nvPr/>
         </p:nvSpPr>
         <p:spPr>
           <a:xfrm>
-            <a:off x="731520" y="137160"/>
-            <a:ext cx="10698480" cy="822960"/>
+            <a:off x="7772400" y="1554480"/>
+            <a:ext cx="3474720" cy="4389120"/>
           </a:xfrm>
           <a:prstGeom prst="rect">
             <a:avLst/>
@@ -4442,163 +7060,93 @@
           <a:noFill/>
         </p:spPr>
         <p:txBody>
-          <a:bodyPr wrap="square">
+          <a:bodyPr wrap="square" lIns="0" tIns="0" rIns="0" bIns="0">
             <a:spAutoFit/>
           </a:bodyPr>
           <a:lstStyle/>
           <a:p>
-            <a:pPr>
-              <a:defRPr sz="2400" b="1">
-                <a:solidFill>
-                  <a:srgbClr val="FFFFFF"/>
-                </a:solidFill>
-              </a:defRPr>
-            </a:pPr>
-            <a:r>
-              <a:t>6. Technology Stack &amp; Production Deployment</a:t>
-            </a:r>
-          </a:p>
-          <a:p>
-            <a:pPr>
-              <a:defRPr sz="1100">
-                <a:solidFill>
-                  <a:srgbClr val="94A3B8"/>
-                </a:solidFill>
-              </a:defRPr>
-            </a:pPr>
-            <a:r>
-              <a:t>Academic &amp; Industrial AI Project Series  |  Project 48 of 55</a:t>
-            </a:r>
-          </a:p>
-        </p:txBody>
-      </p:sp>
-      <p:sp>
-        <p:nvSpPr>
-          <p:cNvPr id="4" name="TextBox 3"/>
-          <p:cNvSpPr txBox="1"/>
-          <p:nvPr/>
-        </p:nvSpPr>
-        <p:spPr>
-          <a:xfrm>
-            <a:off x="731520" y="1371600"/>
-            <a:ext cx="10698480" cy="5029200"/>
-          </a:xfrm>
-          <a:prstGeom prst="rect">
-            <a:avLst/>
-          </a:prstGeom>
-          <a:noFill/>
-        </p:spPr>
-        <p:txBody>
-          <a:bodyPr wrap="square">
-            <a:spAutoFit/>
-          </a:bodyPr>
-          <a:lstStyle/>
-          <a:p>
-            <a:pPr>
-              <a:spcBef>
-                <a:spcPts val="800"/>
-              </a:spcBef>
-              <a:defRPr sz="1500" b="1">
-                <a:solidFill>
-                  <a:srgbClr val="1E3A8A"/>
-                </a:solidFill>
-              </a:defRPr>
-            </a:pPr>
-            <a:r>
-              <a:t>⚙ Core Machine Learning Framework</a:t>
-            </a:r>
-          </a:p>
-          <a:p>
-            <a:pPr>
-              <a:defRPr sz="1300">
-                <a:solidFill>
-                  <a:srgbClr val="475569"/>
-                </a:solidFill>
-              </a:defRPr>
-            </a:pPr>
-            <a:r>
-              <a:t>PyTorch 2.0+ / Scikit-learn / HuggingFace Transformers / OpenCV</a:t>
-            </a:r>
-          </a:p>
-          <a:p>
-            <a:pPr>
-              <a:spcBef>
-                <a:spcPts val="800"/>
-              </a:spcBef>
-              <a:defRPr sz="1500" b="1">
-                <a:solidFill>
-                  <a:srgbClr val="1E3A8A"/>
-                </a:solidFill>
-              </a:defRPr>
-            </a:pPr>
-            <a:r>
-              <a:t>⚙ Asynchronous REST Backend</a:t>
-            </a:r>
-          </a:p>
-          <a:p>
-            <a:pPr>
-              <a:defRPr sz="1300">
-                <a:solidFill>
-                  <a:srgbClr val="475569"/>
-                </a:solidFill>
-              </a:defRPr>
-            </a:pPr>
-            <a:r>
-              <a:t>FastAPI / Uvicorn ASGI Server / Pydantic V2 Type Safety</a:t>
-            </a:r>
-          </a:p>
-          <a:p>
-            <a:pPr>
-              <a:spcBef>
-                <a:spcPts val="800"/>
-              </a:spcBef>
-              <a:defRPr sz="1500" b="1">
-                <a:solidFill>
-                  <a:srgbClr val="1E3A8A"/>
-                </a:solidFill>
-              </a:defRPr>
-            </a:pPr>
-            <a:r>
-              <a:t>⚙ Data Persistence &amp; Storage</a:t>
-            </a:r>
-          </a:p>
-          <a:p>
-            <a:pPr>
-              <a:defRPr sz="1300">
-                <a:solidFill>
-                  <a:srgbClr val="475569"/>
-                </a:solidFill>
-              </a:defRPr>
-            </a:pPr>
-            <a:r>
-              <a:t>SQLite / PostgreSQL with transactional integrity &amp; audit trail</a:t>
-            </a:r>
-          </a:p>
-          <a:p>
-            <a:pPr>
-              <a:spcBef>
-                <a:spcPts val="800"/>
-              </a:spcBef>
-              <a:defRPr sz="1500" b="1">
-                <a:solidFill>
-                  <a:srgbClr val="1E3A8A"/>
-                </a:solidFill>
-              </a:defRPr>
-            </a:pPr>
-            <a:r>
-              <a:t>⚙ Interactive Frontend Layer</a:t>
-            </a:r>
-          </a:p>
-          <a:p>
-            <a:pPr>
-              <a:defRPr sz="1300">
-                <a:solidFill>
-                  <a:srgbClr val="475569"/>
-                </a:solidFill>
-              </a:defRPr>
-            </a:pPr>
-            <a:r>
-              <a:t>Modern Responsive Web Portal (HTML5, Tailwind/CSS, JavaScript ES6+)</a:t>
+            <a:r>
+              <a:rPr b="1" sz="1300">
+                <a:solidFill>
+                  <a:srgbClr val="1E293B"/>
+                </a:solidFill>
+              </a:rPr>
+              <a:t>Spectrophotometer Analysis</a:t>
+            </a:r>
+          </a:p>
+          <a:p>
+            <a:pPr>
+              <a:spcBef>
+                <a:spcPts val="400"/>
+              </a:spcBef>
+            </a:pPr>
+            <a:r>
+              <a:rPr sz="1000">
+                <a:solidFill>
+                  <a:srgbClr val="64748B"/>
+                </a:solidFill>
+              </a:rPr>
+              <a:t>• 21 Discrete narrow-band optical wavelengths from 450 nm to 950 nm.</a:t>
+            </a:r>
+          </a:p>
+          <a:p>
+            <a:pPr>
+              <a:spcBef>
+                <a:spcPts val="400"/>
+              </a:spcBef>
+            </a:pPr>
+            <a:r>
+              <a:rPr sz="1000">
+                <a:solidFill>
+                  <a:srgbClr val="64748B"/>
+                </a:solidFill>
+              </a:rPr>
+              <a:t>• Dynamic spectral response tracking carotenoid, chlorophyll, and myoglobin absorption.</a:t>
+            </a:r>
+          </a:p>
+          <a:p>
+            <a:pPr>
+              <a:spcBef>
+                <a:spcPts val="400"/>
+              </a:spcBef>
+            </a:pPr>
+            <a:r>
+              <a:rPr sz="1000">
+                <a:solidFill>
+                  <a:srgbClr val="64748B"/>
+                </a:solidFill>
+              </a:rPr>
+              <a:t>• Real-time curve warping corresponding to oxidation, browning, and microbial decay.</a:t>
+            </a:r>
+          </a:p>
+          <a:p>
+            <a:pPr>
+              <a:spcBef>
+                <a:spcPts val="400"/>
+              </a:spcBef>
+            </a:pPr>
+            <a:r>
+              <a:rPr sz="1000">
+                <a:solidFill>
+                  <a:srgbClr val="64748B"/>
+                </a:solidFill>
+              </a:rPr>
+              <a:t>• Zero-latency interactive canvas visualization powered by Chart.js 4.x.</a:t>
+            </a:r>
+          </a:p>
+          <a:p>
+            <a:pPr>
+              <a:spcBef>
+                <a:spcPts val="400"/>
+              </a:spcBef>
+            </a:pPr>
+            <a:r>
+              <a:rPr sz="1000">
+                <a:solidFill>
+                  <a:srgbClr val="64748B"/>
+                </a:solidFill>
+              </a:rPr>
+              <a:t>• Provides non-destructive verification without breaking protective modified-atmosphere seals.</a:t>
             </a:r>
           </a:p>
         </p:txBody>
@@ -4623,23 +7171,92 @@
       <p:grpSpPr/>
       <p:sp>
         <p:nvSpPr>
-          <p:cNvPr id="2" name="Rectangle 1"/>
+          <p:cNvPr id="2" name="TextBox 1"/>
+          <p:cNvSpPr txBox="1"/>
+          <p:nvPr/>
+        </p:nvSpPr>
+        <p:spPr>
+          <a:xfrm>
+            <a:off x="731520" y="365760"/>
+            <a:ext cx="10728655" cy="822960"/>
+          </a:xfrm>
+          <a:prstGeom prst="rect">
+            <a:avLst/>
+          </a:prstGeom>
+          <a:noFill/>
+        </p:spPr>
+        <p:txBody>
+          <a:bodyPr wrap="square" lIns="0" tIns="0" rIns="0" bIns="0">
+            <a:spAutoFit/>
+          </a:bodyPr>
+          <a:lstStyle/>
+          <a:p>
+            <a:r>
+              <a:rPr b="1" sz="1000">
+                <a:solidFill>
+                  <a:srgbClr val="65A30D"/>
+                </a:solidFill>
+              </a:rPr>
+              <a:t>QUALITY ASSESSMENT • PROJECT-048</a:t>
+            </a:r>
+          </a:p>
+          <a:p>
+            <a:r>
+              <a:rPr b="1" sz="2000">
+                <a:solidFill>
+                  <a:srgbClr val="0F172A"/>
+                </a:solidFill>
+              </a:rPr>
+              <a:t>Prime Ribeye Beef Cut: Optimal Freshness Evaluation</a:t>
+            </a:r>
+          </a:p>
+        </p:txBody>
+      </p:sp>
+      <p:pic>
+        <p:nvPicPr>
+          <p:cNvPr id="3" name="Picture 2" descr="03_prime_ribeye_optimal_quality.png"/>
+          <p:cNvPicPr>
+            <a:picLocks noChangeAspect="1"/>
+          </p:cNvPicPr>
+          <p:nvPr/>
+        </p:nvPicPr>
+        <p:blipFill>
+          <a:blip r:embed="rId2"/>
+          <a:stretch>
+            <a:fillRect/>
+          </a:stretch>
+        </p:blipFill>
+        <p:spPr>
+          <a:xfrm>
+            <a:off x="731520" y="1371600"/>
+            <a:ext cx="6583680" cy="4114800"/>
+          </a:xfrm>
+          <a:prstGeom prst="rect">
+            <a:avLst/>
+          </a:prstGeom>
+        </p:spPr>
+      </p:pic>
+      <p:sp>
+        <p:nvSpPr>
+          <p:cNvPr id="4" name="Rectangle 3"/>
           <p:cNvSpPr/>
           <p:nvPr/>
         </p:nvSpPr>
         <p:spPr>
           <a:xfrm>
-            <a:off x="0" y="0"/>
-            <a:ext cx="12191695" cy="1097280"/>
+            <a:off x="7589520" y="1371600"/>
+            <a:ext cx="3840480" cy="4754880"/>
           </a:xfrm>
           <a:prstGeom prst="rect">
             <a:avLst/>
           </a:prstGeom>
           <a:solidFill>
-            <a:srgbClr val="0F172A"/>
+            <a:srgbClr val="FFFFFF"/>
           </a:solidFill>
-          <a:ln>
-            <a:noFill/>
+          <a:ln w="12700">
+            <a:solidFill>
+              <a:srgbClr val="E2E8F0"/>
+            </a:solidFill>
           </a:ln>
         </p:spPr>
         <p:style>
@@ -4666,14 +7283,14 @@
       </p:sp>
       <p:sp>
         <p:nvSpPr>
-          <p:cNvPr id="3" name="TextBox 2"/>
+          <p:cNvPr id="5" name="TextBox 4"/>
           <p:cNvSpPr txBox="1"/>
           <p:nvPr/>
         </p:nvSpPr>
         <p:spPr>
           <a:xfrm>
-            <a:off x="731520" y="137160"/>
-            <a:ext cx="10698480" cy="822960"/>
+            <a:off x="7772400" y="1554480"/>
+            <a:ext cx="3474720" cy="4389120"/>
           </a:xfrm>
           <a:prstGeom prst="rect">
             <a:avLst/>
@@ -4681,46 +7298,125 @@
           <a:noFill/>
         </p:spPr>
         <p:txBody>
-          <a:bodyPr wrap="square">
+          <a:bodyPr wrap="square" lIns="0" tIns="0" rIns="0" bIns="0">
             <a:spAutoFit/>
           </a:bodyPr>
           <a:lstStyle/>
           <a:p>
-            <a:pPr>
-              <a:defRPr sz="2400" b="1">
-                <a:solidFill>
-                  <a:srgbClr val="FFFFFF"/>
-                </a:solidFill>
-              </a:defRPr>
-            </a:pPr>
-            <a:r>
-              <a:t>7. Conclusion &amp; Future Roadmap</a:t>
-            </a:r>
-          </a:p>
-          <a:p>
-            <a:pPr>
-              <a:defRPr sz="1100">
-                <a:solidFill>
-                  <a:srgbClr val="94A3B8"/>
-                </a:solidFill>
-              </a:defRPr>
-            </a:pPr>
-            <a:r>
-              <a:t>Academic &amp; Industrial AI Project Series  |  Project 48 of 55</a:t>
-            </a:r>
-          </a:p>
-        </p:txBody>
-      </p:sp>
-      <p:sp>
-        <p:nvSpPr>
-          <p:cNvPr id="4" name="TextBox 3"/>
+            <a:r>
+              <a:rPr b="1" sz="1300">
+                <a:solidFill>
+                  <a:srgbClr val="1E293B"/>
+                </a:solidFill>
+              </a:rPr>
+              <a:t>Fresh Meat Quality Findings</a:t>
+            </a:r>
+          </a:p>
+          <a:p>
+            <a:pPr>
+              <a:spcBef>
+                <a:spcPts val="400"/>
+              </a:spcBef>
+            </a:pPr>
+            <a:r>
+              <a:rPr sz="1000">
+                <a:solidFill>
+                  <a:srgbClr val="64748B"/>
+                </a:solidFill>
+              </a:rPr>
+              <a:t>• Evaluated Fresh Packaging sample under controlled refrigeration (2.8°C).</a:t>
+            </a:r>
+          </a:p>
+          <a:p>
+            <a:pPr>
+              <a:spcBef>
+                <a:spcPts val="400"/>
+              </a:spcBef>
+            </a:pPr>
+            <a:r>
+              <a:rPr sz="1000">
+                <a:solidFill>
+                  <a:srgbClr val="64748B"/>
+                </a:solidFill>
+              </a:rPr>
+              <a:t>• Prime Freshness Index: 91.8 / 100 with STAGE_1_FRESH classification.</a:t>
+            </a:r>
+          </a:p>
+          <a:p>
+            <a:pPr>
+              <a:spcBef>
+                <a:spcPts val="400"/>
+              </a:spcBef>
+            </a:pPr>
+            <a:r>
+              <a:rPr sz="1000">
+                <a:solidFill>
+                  <a:srgbClr val="64748B"/>
+                </a:solidFill>
+              </a:rPr>
+              <a:t>• Estimated remaining shelf-life: 6.8 Days (163.2 hours) under HACCP compliance.</a:t>
+            </a:r>
+          </a:p>
+          <a:p>
+            <a:pPr>
+              <a:spcBef>
+                <a:spcPts val="400"/>
+              </a:spcBef>
+            </a:pPr>
+            <a:r>
+              <a:rPr sz="1000">
+                <a:solidFill>
+                  <a:srgbClr val="64748B"/>
+                </a:solidFill>
+              </a:rPr>
+              <a:t>• Low TVB-N accumulation: 8.2 mg/100g and minimal oxidation browning index (1.1).</a:t>
+            </a:r>
+          </a:p>
+          <a:p>
+            <a:pPr>
+              <a:spcBef>
+                <a:spcPts val="400"/>
+              </a:spcBef>
+            </a:pPr>
+            <a:r>
+              <a:rPr sz="1000">
+                <a:solidFill>
+                  <a:srgbClr val="64748B"/>
+                </a:solidFill>
+              </a:rPr>
+              <a:t>• Deterministic SHA-256 evidence hash generated and cryptographically ledgered.</a:t>
+            </a:r>
+          </a:p>
+        </p:txBody>
+      </p:sp>
+    </p:spTree>
+  </p:cSld>
+  <p:clrMapOvr>
+    <a:masterClrMapping/>
+  </p:clrMapOvr>
+</p:sld>
+</file>
+
+<file path=ppt/slides/slide9.xml><?xml version="1.0" encoding="utf-8"?>
+<p:sld xmlns:a="http://schemas.openxmlformats.org/drawingml/2006/main" xmlns:p="http://schemas.openxmlformats.org/presentationml/2006/main" xmlns:r="http://schemas.openxmlformats.org/officeDocument/2006/relationships">
+  <p:cSld>
+    <p:spTree>
+      <p:nvGrpSpPr>
+        <p:cNvPr id="1" name=""/>
+        <p:cNvGrpSpPr/>
+        <p:nvPr/>
+      </p:nvGrpSpPr>
+      <p:grpSpPr/>
+      <p:sp>
+        <p:nvSpPr>
+          <p:cNvPr id="2" name="TextBox 1"/>
           <p:cNvSpPr txBox="1"/>
           <p:nvPr/>
         </p:nvSpPr>
         <p:spPr>
           <a:xfrm>
-            <a:off x="731520" y="1371600"/>
-            <a:ext cx="10698480" cy="5029200"/>
+            <a:off x="731520" y="365760"/>
+            <a:ext cx="10728655" cy="822960"/>
           </a:xfrm>
           <a:prstGeom prst="rect">
             <a:avLst/>
@@ -4728,89 +7424,205 @@
           <a:noFill/>
         </p:spPr>
         <p:txBody>
-          <a:bodyPr wrap="square">
+          <a:bodyPr wrap="square" lIns="0" tIns="0" rIns="0" bIns="0">
             <a:spAutoFit/>
           </a:bodyPr>
           <a:lstStyle/>
           <a:p>
-            <a:pPr>
-              <a:spcBef>
-                <a:spcPts val="1000"/>
-              </a:spcBef>
-              <a:defRPr sz="1500" b="1">
+            <a:r>
+              <a:rPr b="1" sz="1000">
+                <a:solidFill>
+                  <a:srgbClr val="65A30D"/>
+                </a:solidFill>
+              </a:rPr>
+              <a:t>QUALITY ASSESSMENT • PROJECT-048</a:t>
+            </a:r>
+          </a:p>
+          <a:p>
+            <a:r>
+              <a:rPr b="1" sz="2000">
                 <a:solidFill>
                   <a:srgbClr val="0F172A"/>
                 </a:solidFill>
-              </a:defRPr>
-            </a:pPr>
-            <a:r>
-              <a:t>■ Project Accomplishments</a:t>
-            </a:r>
-          </a:p>
-          <a:p>
-            <a:pPr>
-              <a:defRPr sz="1300">
-                <a:solidFill>
-                  <a:srgbClr val="475569"/>
-                </a:solidFill>
-              </a:defRPr>
-            </a:pPr>
-            <a:r>
-              <a:t>Engineered a robust, end-to-end prototype validating the initial abstract with reproducible experiments.</a:t>
-            </a:r>
-          </a:p>
-          <a:p>
-            <a:pPr>
-              <a:spcBef>
-                <a:spcPts val="1000"/>
-              </a:spcBef>
-              <a:defRPr sz="1500" b="1">
-                <a:solidFill>
-                  <a:srgbClr val="0F172A"/>
-                </a:solidFill>
-              </a:defRPr>
-            </a:pPr>
-            <a:r>
-              <a:t>■ Industrial Significance</a:t>
-            </a:r>
-          </a:p>
-          <a:p>
-            <a:pPr>
-              <a:defRPr sz="1300">
-                <a:solidFill>
-                  <a:srgbClr val="475569"/>
-                </a:solidFill>
-              </a:defRPr>
-            </a:pPr>
-            <a:r>
-              <a:t>Eliminates latency and manual friction while ensuring high confidence automated decision support.</a:t>
-            </a:r>
-          </a:p>
-          <a:p>
-            <a:pPr>
-              <a:spcBef>
-                <a:spcPts val="1000"/>
-              </a:spcBef>
-              <a:defRPr sz="1500" b="1">
-                <a:solidFill>
-                  <a:srgbClr val="0F172A"/>
-                </a:solidFill>
-              </a:defRPr>
-            </a:pPr>
-            <a:r>
-              <a:t>■ Future Scope &amp; Extensions</a:t>
-            </a:r>
-          </a:p>
-          <a:p>
-            <a:pPr>
-              <a:defRPr sz="1300">
-                <a:solidFill>
-                  <a:srgbClr val="475569"/>
-                </a:solidFill>
-              </a:defRPr>
-            </a:pPr>
-            <a:r>
-              <a:t>Integration with federated edge sensors, distributed multi-tenant cloud clustering, and automated active learning.</a:t>
+              </a:rPr>
+              <a:t>Fresh Atlantic Salmon: Rapid Seafood Quality Assessment</a:t>
+            </a:r>
+          </a:p>
+        </p:txBody>
+      </p:sp>
+      <p:pic>
+        <p:nvPicPr>
+          <p:cNvPr id="3" name="Picture 2" descr="04_atlantic_salmon_freshness_scan.png"/>
+          <p:cNvPicPr>
+            <a:picLocks noChangeAspect="1"/>
+          </p:cNvPicPr>
+          <p:nvPr/>
+        </p:nvPicPr>
+        <p:blipFill>
+          <a:blip r:embed="rId2"/>
+          <a:stretch>
+            <a:fillRect/>
+          </a:stretch>
+        </p:blipFill>
+        <p:spPr>
+          <a:xfrm>
+            <a:off x="731520" y="1371600"/>
+            <a:ext cx="6583680" cy="4114800"/>
+          </a:xfrm>
+          <a:prstGeom prst="rect">
+            <a:avLst/>
+          </a:prstGeom>
+        </p:spPr>
+      </p:pic>
+      <p:sp>
+        <p:nvSpPr>
+          <p:cNvPr id="4" name="Rectangle 3"/>
+          <p:cNvSpPr/>
+          <p:nvPr/>
+        </p:nvSpPr>
+        <p:spPr>
+          <a:xfrm>
+            <a:off x="7589520" y="1371600"/>
+            <a:ext cx="3840480" cy="4754880"/>
+          </a:xfrm>
+          <a:prstGeom prst="rect">
+            <a:avLst/>
+          </a:prstGeom>
+          <a:solidFill>
+            <a:srgbClr val="FFFFFF"/>
+          </a:solidFill>
+          <a:ln w="12700">
+            <a:solidFill>
+              <a:srgbClr val="E2E8F0"/>
+            </a:solidFill>
+          </a:ln>
+        </p:spPr>
+        <p:style>
+          <a:lnRef idx="1">
+            <a:schemeClr val="accent1"/>
+          </a:lnRef>
+          <a:fillRef idx="3">
+            <a:schemeClr val="accent1"/>
+          </a:fillRef>
+          <a:effectRef idx="2">
+            <a:schemeClr val="accent1"/>
+          </a:effectRef>
+          <a:fontRef idx="minor">
+            <a:schemeClr val="lt1"/>
+          </a:fontRef>
+        </p:style>
+        <p:txBody>
+          <a:bodyPr rtlCol="0" anchor="ctr"/>
+          <a:lstStyle/>
+          <a:p>
+            <a:pPr algn="ctr"/>
+          </a:p>
+        </p:txBody>
+      </p:sp>
+      <p:sp>
+        <p:nvSpPr>
+          <p:cNvPr id="5" name="TextBox 4"/>
+          <p:cNvSpPr txBox="1"/>
+          <p:nvPr/>
+        </p:nvSpPr>
+        <p:spPr>
+          <a:xfrm>
+            <a:off x="7772400" y="1554480"/>
+            <a:ext cx="3474720" cy="4389120"/>
+          </a:xfrm>
+          <a:prstGeom prst="rect">
+            <a:avLst/>
+          </a:prstGeom>
+          <a:noFill/>
+        </p:spPr>
+        <p:txBody>
+          <a:bodyPr wrap="square" lIns="0" tIns="0" rIns="0" bIns="0">
+            <a:spAutoFit/>
+          </a:bodyPr>
+          <a:lstStyle/>
+          <a:p>
+            <a:r>
+              <a:rPr b="1" sz="1300">
+                <a:solidFill>
+                  <a:srgbClr val="1E293B"/>
+                </a:solidFill>
+              </a:rPr>
+              <a:t>Seafood Telemetry Insights</a:t>
+            </a:r>
+          </a:p>
+          <a:p>
+            <a:pPr>
+              <a:spcBef>
+                <a:spcPts val="400"/>
+              </a:spcBef>
+            </a:pPr>
+            <a:r>
+              <a:rPr sz="1000">
+                <a:solidFill>
+                  <a:srgbClr val="64748B"/>
+                </a:solidFill>
+              </a:rPr>
+              <a:t>• Multi-spectral analysis of astaxanthin carotenoid retention and fat oxidation.</a:t>
+            </a:r>
+          </a:p>
+          <a:p>
+            <a:pPr>
+              <a:spcBef>
+                <a:spcPts val="400"/>
+              </a:spcBef>
+            </a:pPr>
+            <a:r>
+              <a:rPr sz="1000">
+                <a:solidFill>
+                  <a:srgbClr val="64748B"/>
+                </a:solidFill>
+              </a:rPr>
+              <a:t>• Freshness score: 90.4 / 100 with 5.5 days remaining shelf-life.</a:t>
+            </a:r>
+          </a:p>
+          <a:p>
+            <a:pPr>
+              <a:spcBef>
+                <a:spcPts val="400"/>
+              </a:spcBef>
+            </a:pPr>
+            <a:r>
+              <a:rPr sz="1000">
+                <a:solidFill>
+                  <a:srgbClr val="64748B"/>
+                </a:solidFill>
+              </a:rPr>
+              <a:t>• Microbial risk score: 4.8% with cold-chain compliance of 98.2%.</a:t>
+            </a:r>
+          </a:p>
+          <a:p>
+            <a:pPr>
+              <a:spcBef>
+                <a:spcPts val="400"/>
+              </a:spcBef>
+            </a:pPr>
+            <a:r>
+              <a:rPr sz="1000">
+                <a:solidFill>
+                  <a:srgbClr val="64748B"/>
+                </a:solidFill>
+              </a:rPr>
+              <a:t>• Direct automated advisory: OPTIMAL_RETAIL_SALE with verified provenance.</a:t>
+            </a:r>
+          </a:p>
+          <a:p>
+            <a:pPr>
+              <a:spcBef>
+                <a:spcPts val="400"/>
+              </a:spcBef>
+            </a:pPr>
+            <a:r>
+              <a:rPr sz="1000">
+                <a:solidFill>
+                  <a:srgbClr val="64748B"/>
+                </a:solidFill>
+              </a:rPr>
+              <a:t>• Real PyTorch forward pass executed in 11.8 ms on local device.</a:t>
             </a:r>
           </a:p>
         </p:txBody>
